--- a/docs/pptx/whole/ritu-linsubhr-sens-anemia2.pptx
+++ b/docs/pptx/whole/ritu-linsubhr-sens-anemia2.pptx
@@ -3002,612 +3002,612 @@
           </p:nvSpPr>
           <p:spPr>
             <a:xfrm>
-              <a:off x="1172049" y="3691571"/>
-              <a:ext cx="7090630" cy="1557512"/>
+              <a:off x="1172049" y="3704579"/>
+              <a:ext cx="7090630" cy="1541860"/>
             </a:xfrm>
             <a:custGeom>
               <a:avLst/>
               <a:pathLst>
-                <a:path w="7090630" h="1557512">
+                <a:path w="7090630" h="1541860">
                   <a:moveTo>
                     <a:pt x="0" y="0"/>
                   </a:moveTo>
                   <a:lnTo>
-                    <a:pt x="71622" y="33628"/>
-                  </a:lnTo>
-                  <a:lnTo>
-                    <a:pt x="143245" y="66651"/>
-                  </a:lnTo>
-                  <a:lnTo>
-                    <a:pt x="214867" y="99078"/>
-                  </a:lnTo>
-                  <a:lnTo>
-                    <a:pt x="286490" y="130921"/>
-                  </a:lnTo>
-                  <a:lnTo>
-                    <a:pt x="358112" y="162189"/>
-                  </a:lnTo>
-                  <a:lnTo>
-                    <a:pt x="429735" y="192895"/>
-                  </a:lnTo>
-                  <a:lnTo>
-                    <a:pt x="501357" y="223046"/>
-                  </a:lnTo>
-                  <a:lnTo>
-                    <a:pt x="572980" y="252655"/>
-                  </a:lnTo>
-                  <a:lnTo>
-                    <a:pt x="644602" y="281729"/>
-                  </a:lnTo>
-                  <a:lnTo>
-                    <a:pt x="716225" y="310280"/>
-                  </a:lnTo>
-                  <a:lnTo>
-                    <a:pt x="787847" y="338315"/>
-                  </a:lnTo>
-                  <a:lnTo>
-                    <a:pt x="859470" y="365846"/>
-                  </a:lnTo>
-                  <a:lnTo>
-                    <a:pt x="931092" y="392880"/>
-                  </a:lnTo>
-                  <a:lnTo>
-                    <a:pt x="1002715" y="419427"/>
-                  </a:lnTo>
-                  <a:lnTo>
-                    <a:pt x="1074337" y="445496"/>
-                  </a:lnTo>
-                  <a:lnTo>
-                    <a:pt x="1145960" y="471094"/>
-                  </a:lnTo>
-                  <a:lnTo>
-                    <a:pt x="1217582" y="496232"/>
-                  </a:lnTo>
-                  <a:lnTo>
-                    <a:pt x="1289205" y="520916"/>
-                  </a:lnTo>
-                  <a:lnTo>
-                    <a:pt x="1360827" y="545155"/>
-                  </a:lnTo>
-                  <a:lnTo>
-                    <a:pt x="1432450" y="568957"/>
-                  </a:lnTo>
-                  <a:lnTo>
-                    <a:pt x="1504073" y="592330"/>
-                  </a:lnTo>
-                  <a:lnTo>
-                    <a:pt x="1575695" y="615282"/>
-                  </a:lnTo>
-                  <a:lnTo>
-                    <a:pt x="1647318" y="637821"/>
-                  </a:lnTo>
-                  <a:lnTo>
-                    <a:pt x="1718940" y="659952"/>
-                  </a:lnTo>
-                  <a:lnTo>
-                    <a:pt x="1790563" y="681686"/>
-                  </a:lnTo>
-                  <a:lnTo>
-                    <a:pt x="1862185" y="703027"/>
-                  </a:lnTo>
-                  <a:lnTo>
-                    <a:pt x="1933808" y="723984"/>
-                  </a:lnTo>
-                  <a:lnTo>
-                    <a:pt x="2005430" y="744562"/>
-                  </a:lnTo>
-                  <a:lnTo>
-                    <a:pt x="2077053" y="764770"/>
-                  </a:lnTo>
-                  <a:lnTo>
-                    <a:pt x="2148675" y="784614"/>
-                  </a:lnTo>
-                  <a:lnTo>
-                    <a:pt x="2220298" y="804100"/>
-                  </a:lnTo>
-                  <a:lnTo>
-                    <a:pt x="2291920" y="823235"/>
-                  </a:lnTo>
-                  <a:lnTo>
-                    <a:pt x="2363543" y="842025"/>
-                  </a:lnTo>
-                  <a:lnTo>
-                    <a:pt x="2435165" y="860476"/>
-                  </a:lnTo>
-                  <a:lnTo>
-                    <a:pt x="2506788" y="878595"/>
-                  </a:lnTo>
-                  <a:lnTo>
-                    <a:pt x="2578410" y="896387"/>
-                  </a:lnTo>
-                  <a:lnTo>
-                    <a:pt x="2650033" y="913858"/>
-                  </a:lnTo>
-                  <a:lnTo>
-                    <a:pt x="2721655" y="931015"/>
-                  </a:lnTo>
-                  <a:lnTo>
-                    <a:pt x="2793278" y="947862"/>
-                  </a:lnTo>
-                  <a:lnTo>
-                    <a:pt x="2864901" y="964405"/>
-                  </a:lnTo>
-                  <a:lnTo>
-                    <a:pt x="2936523" y="980651"/>
-                  </a:lnTo>
-                  <a:lnTo>
-                    <a:pt x="3008146" y="996603"/>
-                  </a:lnTo>
-                  <a:lnTo>
-                    <a:pt x="3079768" y="1012268"/>
-                  </a:lnTo>
-                  <a:lnTo>
-                    <a:pt x="3151391" y="1027651"/>
-                  </a:lnTo>
-                  <a:lnTo>
-                    <a:pt x="3223013" y="1036463"/>
-                  </a:lnTo>
-                  <a:lnTo>
-                    <a:pt x="3294636" y="1037034"/>
-                  </a:lnTo>
-                  <a:lnTo>
-                    <a:pt x="3366258" y="1037605"/>
-                  </a:lnTo>
-                  <a:lnTo>
-                    <a:pt x="3437881" y="1038175"/>
-                  </a:lnTo>
-                  <a:lnTo>
-                    <a:pt x="3509503" y="1038745"/>
-                  </a:lnTo>
-                  <a:lnTo>
-                    <a:pt x="3581126" y="1039315"/>
-                  </a:lnTo>
-                  <a:lnTo>
-                    <a:pt x="3652748" y="1039884"/>
-                  </a:lnTo>
-                  <a:lnTo>
-                    <a:pt x="3724371" y="1040453"/>
-                  </a:lnTo>
-                  <a:lnTo>
-                    <a:pt x="3795993" y="1041021"/>
-                  </a:lnTo>
-                  <a:lnTo>
-                    <a:pt x="3867616" y="1041589"/>
-                  </a:lnTo>
-                  <a:lnTo>
-                    <a:pt x="3939238" y="1042157"/>
-                  </a:lnTo>
-                  <a:lnTo>
-                    <a:pt x="4010861" y="1042724"/>
-                  </a:lnTo>
-                  <a:lnTo>
-                    <a:pt x="4082483" y="1043291"/>
-                  </a:lnTo>
-                  <a:lnTo>
-                    <a:pt x="4154106" y="1043858"/>
-                  </a:lnTo>
-                  <a:lnTo>
-                    <a:pt x="4225729" y="1044424"/>
-                  </a:lnTo>
-                  <a:lnTo>
-                    <a:pt x="4297351" y="1044990"/>
-                  </a:lnTo>
-                  <a:lnTo>
-                    <a:pt x="4368974" y="1045555"/>
-                  </a:lnTo>
-                  <a:lnTo>
-                    <a:pt x="4440596" y="1046120"/>
-                  </a:lnTo>
-                  <a:lnTo>
-                    <a:pt x="4512219" y="1046684"/>
-                  </a:lnTo>
-                  <a:lnTo>
-                    <a:pt x="4583841" y="1047249"/>
-                  </a:lnTo>
-                  <a:lnTo>
-                    <a:pt x="4655464" y="1047812"/>
-                  </a:lnTo>
-                  <a:lnTo>
-                    <a:pt x="4727086" y="1048376"/>
-                  </a:lnTo>
-                  <a:lnTo>
-                    <a:pt x="4798709" y="1048939"/>
-                  </a:lnTo>
-                  <a:lnTo>
-                    <a:pt x="4870331" y="1049501"/>
-                  </a:lnTo>
-                  <a:lnTo>
-                    <a:pt x="4941954" y="1050064"/>
-                  </a:lnTo>
-                  <a:lnTo>
-                    <a:pt x="5013576" y="1050625"/>
-                  </a:lnTo>
-                  <a:lnTo>
-                    <a:pt x="5085199" y="1051187"/>
-                  </a:lnTo>
-                  <a:lnTo>
-                    <a:pt x="5156821" y="1051748"/>
-                  </a:lnTo>
-                  <a:lnTo>
-                    <a:pt x="5228444" y="1052309"/>
-                  </a:lnTo>
-                  <a:lnTo>
-                    <a:pt x="5300066" y="1052869"/>
-                  </a:lnTo>
-                  <a:lnTo>
-                    <a:pt x="5371689" y="1053429"/>
-                  </a:lnTo>
-                  <a:lnTo>
-                    <a:pt x="5443311" y="1053988"/>
-                  </a:lnTo>
-                  <a:lnTo>
-                    <a:pt x="5514934" y="1054547"/>
-                  </a:lnTo>
-                  <a:lnTo>
-                    <a:pt x="5586557" y="1055106"/>
-                  </a:lnTo>
-                  <a:lnTo>
-                    <a:pt x="5658179" y="1055664"/>
-                  </a:lnTo>
-                  <a:lnTo>
-                    <a:pt x="5729802" y="1056222"/>
-                  </a:lnTo>
-                  <a:lnTo>
-                    <a:pt x="5801424" y="1056780"/>
-                  </a:lnTo>
-                  <a:lnTo>
-                    <a:pt x="5873047" y="1057337"/>
-                  </a:lnTo>
-                  <a:lnTo>
-                    <a:pt x="5944669" y="1057894"/>
-                  </a:lnTo>
-                  <a:lnTo>
-                    <a:pt x="6016292" y="1058451"/>
-                  </a:lnTo>
-                  <a:lnTo>
-                    <a:pt x="6087914" y="1059007"/>
-                  </a:lnTo>
-                  <a:lnTo>
-                    <a:pt x="6159537" y="1059562"/>
-                  </a:lnTo>
-                  <a:lnTo>
-                    <a:pt x="6231159" y="1060118"/>
-                  </a:lnTo>
-                  <a:lnTo>
-                    <a:pt x="6302782" y="1060672"/>
-                  </a:lnTo>
-                  <a:lnTo>
-                    <a:pt x="6374404" y="1061227"/>
-                  </a:lnTo>
-                  <a:lnTo>
-                    <a:pt x="6446027" y="1061781"/>
-                  </a:lnTo>
-                  <a:lnTo>
-                    <a:pt x="6517649" y="1062335"/>
-                  </a:lnTo>
-                  <a:lnTo>
-                    <a:pt x="6589272" y="1062888"/>
-                  </a:lnTo>
-                  <a:lnTo>
-                    <a:pt x="6660894" y="1063441"/>
-                  </a:lnTo>
-                  <a:lnTo>
-                    <a:pt x="6732517" y="1063994"/>
-                  </a:lnTo>
-                  <a:lnTo>
-                    <a:pt x="6804139" y="1064546"/>
-                  </a:lnTo>
-                  <a:lnTo>
-                    <a:pt x="6875762" y="1065098"/>
-                  </a:lnTo>
-                  <a:lnTo>
-                    <a:pt x="6947385" y="1065649"/>
-                  </a:lnTo>
-                  <a:lnTo>
-                    <a:pt x="7019007" y="1066201"/>
-                  </a:lnTo>
-                  <a:lnTo>
-                    <a:pt x="7090630" y="1066751"/>
-                  </a:lnTo>
-                  <a:lnTo>
-                    <a:pt x="7090630" y="1557512"/>
-                  </a:lnTo>
-                  <a:lnTo>
-                    <a:pt x="7019007" y="1551855"/>
-                  </a:lnTo>
-                  <a:lnTo>
-                    <a:pt x="6947385" y="1546095"/>
-                  </a:lnTo>
-                  <a:lnTo>
-                    <a:pt x="6875762" y="1540228"/>
-                  </a:lnTo>
-                  <a:lnTo>
-                    <a:pt x="6804139" y="1534255"/>
-                  </a:lnTo>
-                  <a:lnTo>
-                    <a:pt x="6732517" y="1528171"/>
-                  </a:lnTo>
-                  <a:lnTo>
-                    <a:pt x="6660894" y="1521976"/>
-                  </a:lnTo>
-                  <a:lnTo>
-                    <a:pt x="6589272" y="1515667"/>
-                  </a:lnTo>
-                  <a:lnTo>
-                    <a:pt x="6517649" y="1509242"/>
-                  </a:lnTo>
-                  <a:lnTo>
-                    <a:pt x="6446027" y="1502700"/>
-                  </a:lnTo>
-                  <a:lnTo>
-                    <a:pt x="6374404" y="1496037"/>
-                  </a:lnTo>
-                  <a:lnTo>
-                    <a:pt x="6302782" y="1489252"/>
-                  </a:lnTo>
-                  <a:lnTo>
-                    <a:pt x="6231159" y="1482342"/>
-                  </a:lnTo>
-                  <a:lnTo>
-                    <a:pt x="6159537" y="1475306"/>
-                  </a:lnTo>
-                  <a:lnTo>
-                    <a:pt x="6087914" y="1468140"/>
-                  </a:lnTo>
-                  <a:lnTo>
-                    <a:pt x="6016292" y="1460843"/>
-                  </a:lnTo>
-                  <a:lnTo>
-                    <a:pt x="5944669" y="1453412"/>
-                  </a:lnTo>
-                  <a:lnTo>
-                    <a:pt x="5873047" y="1445845"/>
-                  </a:lnTo>
-                  <a:lnTo>
-                    <a:pt x="5801424" y="1438138"/>
-                  </a:lnTo>
-                  <a:lnTo>
-                    <a:pt x="5729802" y="1430291"/>
-                  </a:lnTo>
-                  <a:lnTo>
-                    <a:pt x="5658179" y="1422299"/>
-                  </a:lnTo>
-                  <a:lnTo>
-                    <a:pt x="5586557" y="1414160"/>
-                  </a:lnTo>
-                  <a:lnTo>
-                    <a:pt x="5514934" y="1405872"/>
-                  </a:lnTo>
-                  <a:lnTo>
-                    <a:pt x="5443311" y="1397432"/>
-                  </a:lnTo>
-                  <a:lnTo>
-                    <a:pt x="5371689" y="1388837"/>
-                  </a:lnTo>
-                  <a:lnTo>
-                    <a:pt x="5300066" y="1380085"/>
-                  </a:lnTo>
-                  <a:lnTo>
-                    <a:pt x="5228444" y="1371171"/>
-                  </a:lnTo>
-                  <a:lnTo>
-                    <a:pt x="5156821" y="1362094"/>
-                  </a:lnTo>
-                  <a:lnTo>
-                    <a:pt x="5085199" y="1352850"/>
-                  </a:lnTo>
-                  <a:lnTo>
-                    <a:pt x="5013576" y="1343437"/>
-                  </a:lnTo>
-                  <a:lnTo>
-                    <a:pt x="4941954" y="1333851"/>
-                  </a:lnTo>
-                  <a:lnTo>
-                    <a:pt x="4870331" y="1324089"/>
-                  </a:lnTo>
-                  <a:lnTo>
-                    <a:pt x="4798709" y="1314148"/>
-                  </a:lnTo>
-                  <a:lnTo>
-                    <a:pt x="4727086" y="1304024"/>
-                  </a:lnTo>
-                  <a:lnTo>
-                    <a:pt x="4655464" y="1293714"/>
-                  </a:lnTo>
-                  <a:lnTo>
-                    <a:pt x="4583841" y="1283216"/>
-                  </a:lnTo>
-                  <a:lnTo>
-                    <a:pt x="4512219" y="1272524"/>
-                  </a:lnTo>
-                  <a:lnTo>
-                    <a:pt x="4440596" y="1261636"/>
-                  </a:lnTo>
-                  <a:lnTo>
-                    <a:pt x="4368974" y="1250549"/>
-                  </a:lnTo>
-                  <a:lnTo>
-                    <a:pt x="4297351" y="1239257"/>
-                  </a:lnTo>
-                  <a:lnTo>
-                    <a:pt x="4225729" y="1227759"/>
-                  </a:lnTo>
-                  <a:lnTo>
-                    <a:pt x="4154106" y="1216050"/>
-                  </a:lnTo>
-                  <a:lnTo>
-                    <a:pt x="4082483" y="1204125"/>
-                  </a:lnTo>
-                  <a:lnTo>
-                    <a:pt x="4010861" y="1191982"/>
-                  </a:lnTo>
-                  <a:lnTo>
-                    <a:pt x="3939238" y="1179616"/>
-                  </a:lnTo>
-                  <a:lnTo>
-                    <a:pt x="3867616" y="1167023"/>
-                  </a:lnTo>
-                  <a:lnTo>
-                    <a:pt x="3795993" y="1154198"/>
-                  </a:lnTo>
-                  <a:lnTo>
-                    <a:pt x="3724371" y="1141138"/>
-                  </a:lnTo>
-                  <a:lnTo>
-                    <a:pt x="3652748" y="1127839"/>
-                  </a:lnTo>
-                  <a:lnTo>
-                    <a:pt x="3581126" y="1114295"/>
-                  </a:lnTo>
-                  <a:lnTo>
-                    <a:pt x="3509503" y="1100503"/>
-                  </a:lnTo>
-                  <a:lnTo>
-                    <a:pt x="3437881" y="1086458"/>
-                  </a:lnTo>
-                  <a:lnTo>
-                    <a:pt x="3366258" y="1072155"/>
-                  </a:lnTo>
-                  <a:lnTo>
-                    <a:pt x="3294636" y="1057589"/>
-                  </a:lnTo>
-                  <a:lnTo>
-                    <a:pt x="3223013" y="1042756"/>
-                  </a:lnTo>
-                  <a:lnTo>
-                    <a:pt x="3151391" y="1035891"/>
-                  </a:lnTo>
-                  <a:lnTo>
-                    <a:pt x="3079768" y="1035319"/>
-                  </a:lnTo>
-                  <a:lnTo>
-                    <a:pt x="3008146" y="1034747"/>
-                  </a:lnTo>
-                  <a:lnTo>
-                    <a:pt x="2936523" y="1034174"/>
-                  </a:lnTo>
-                  <a:lnTo>
-                    <a:pt x="2864901" y="1033601"/>
-                  </a:lnTo>
-                  <a:lnTo>
-                    <a:pt x="2793278" y="1033027"/>
-                  </a:lnTo>
-                  <a:lnTo>
-                    <a:pt x="2721655" y="1032453"/>
-                  </a:lnTo>
-                  <a:lnTo>
-                    <a:pt x="2650033" y="1031879"/>
-                  </a:lnTo>
-                  <a:lnTo>
-                    <a:pt x="2578410" y="1031304"/>
-                  </a:lnTo>
-                  <a:lnTo>
-                    <a:pt x="2506788" y="1030729"/>
-                  </a:lnTo>
-                  <a:lnTo>
-                    <a:pt x="2435165" y="1030153"/>
-                  </a:lnTo>
-                  <a:lnTo>
-                    <a:pt x="2363543" y="1029577"/>
-                  </a:lnTo>
-                  <a:lnTo>
-                    <a:pt x="2291920" y="1029001"/>
-                  </a:lnTo>
-                  <a:lnTo>
-                    <a:pt x="2220298" y="1028424"/>
-                  </a:lnTo>
-                  <a:lnTo>
-                    <a:pt x="2148675" y="1027847"/>
-                  </a:lnTo>
-                  <a:lnTo>
-                    <a:pt x="2077053" y="1027270"/>
-                  </a:lnTo>
-                  <a:lnTo>
-                    <a:pt x="2005430" y="1026692"/>
-                  </a:lnTo>
-                  <a:lnTo>
-                    <a:pt x="1933808" y="1026113"/>
-                  </a:lnTo>
-                  <a:lnTo>
-                    <a:pt x="1862185" y="1025535"/>
-                  </a:lnTo>
-                  <a:lnTo>
-                    <a:pt x="1790563" y="1024956"/>
-                  </a:lnTo>
-                  <a:lnTo>
-                    <a:pt x="1718940" y="1024376"/>
-                  </a:lnTo>
-                  <a:lnTo>
-                    <a:pt x="1647318" y="1023796"/>
-                  </a:lnTo>
-                  <a:lnTo>
-                    <a:pt x="1575695" y="1023216"/>
-                  </a:lnTo>
-                  <a:lnTo>
-                    <a:pt x="1504073" y="1022635"/>
-                  </a:lnTo>
-                  <a:lnTo>
-                    <a:pt x="1432450" y="1022054"/>
-                  </a:lnTo>
-                  <a:lnTo>
-                    <a:pt x="1360827" y="1021472"/>
-                  </a:lnTo>
-                  <a:lnTo>
-                    <a:pt x="1289205" y="1020891"/>
-                  </a:lnTo>
-                  <a:lnTo>
-                    <a:pt x="1217582" y="1020308"/>
-                  </a:lnTo>
-                  <a:lnTo>
-                    <a:pt x="1145960" y="1019725"/>
-                  </a:lnTo>
-                  <a:lnTo>
-                    <a:pt x="1074337" y="1019142"/>
-                  </a:lnTo>
-                  <a:lnTo>
-                    <a:pt x="1002715" y="1018559"/>
-                  </a:lnTo>
-                  <a:lnTo>
-                    <a:pt x="931092" y="1017975"/>
-                  </a:lnTo>
-                  <a:lnTo>
-                    <a:pt x="859470" y="1017391"/>
-                  </a:lnTo>
-                  <a:lnTo>
-                    <a:pt x="787847" y="1016806"/>
-                  </a:lnTo>
-                  <a:lnTo>
-                    <a:pt x="716225" y="1016221"/>
-                  </a:lnTo>
-                  <a:lnTo>
-                    <a:pt x="644602" y="1015635"/>
-                  </a:lnTo>
-                  <a:lnTo>
-                    <a:pt x="572980" y="1015049"/>
-                  </a:lnTo>
-                  <a:lnTo>
-                    <a:pt x="501357" y="1014463"/>
-                  </a:lnTo>
-                  <a:lnTo>
-                    <a:pt x="429735" y="1013876"/>
-                  </a:lnTo>
-                  <a:lnTo>
-                    <a:pt x="358112" y="1013289"/>
-                  </a:lnTo>
-                  <a:lnTo>
-                    <a:pt x="286490" y="1012701"/>
-                  </a:lnTo>
-                  <a:lnTo>
-                    <a:pt x="214867" y="1012113"/>
-                  </a:lnTo>
-                  <a:lnTo>
-                    <a:pt x="143245" y="1011525"/>
-                  </a:lnTo>
-                  <a:lnTo>
-                    <a:pt x="71622" y="1010936"/>
-                  </a:lnTo>
-                  <a:lnTo>
-                    <a:pt x="0" y="1010347"/>
+                    <a:pt x="71622" y="33108"/>
+                  </a:lnTo>
+                  <a:lnTo>
+                    <a:pt x="143245" y="65625"/>
+                  </a:lnTo>
+                  <a:lnTo>
+                    <a:pt x="214867" y="97561"/>
+                  </a:lnTo>
+                  <a:lnTo>
+                    <a:pt x="286490" y="128926"/>
+                  </a:lnTo>
+                  <a:lnTo>
+                    <a:pt x="358112" y="159730"/>
+                  </a:lnTo>
+                  <a:lnTo>
+                    <a:pt x="429735" y="189984"/>
+                  </a:lnTo>
+                  <a:lnTo>
+                    <a:pt x="501357" y="219698"/>
+                  </a:lnTo>
+                  <a:lnTo>
+                    <a:pt x="572980" y="248880"/>
+                  </a:lnTo>
+                  <a:lnTo>
+                    <a:pt x="644602" y="277541"/>
+                  </a:lnTo>
+                  <a:lnTo>
+                    <a:pt x="716225" y="305690"/>
+                  </a:lnTo>
+                  <a:lnTo>
+                    <a:pt x="787847" y="333335"/>
+                  </a:lnTo>
+                  <a:lnTo>
+                    <a:pt x="859470" y="360487"/>
+                  </a:lnTo>
+                  <a:lnTo>
+                    <a:pt x="931092" y="387153"/>
+                  </a:lnTo>
+                  <a:lnTo>
+                    <a:pt x="1002715" y="413343"/>
+                  </a:lnTo>
+                  <a:lnTo>
+                    <a:pt x="1074337" y="439065"/>
+                  </a:lnTo>
+                  <a:lnTo>
+                    <a:pt x="1145960" y="464327"/>
+                  </a:lnTo>
+                  <a:lnTo>
+                    <a:pt x="1217582" y="489138"/>
+                  </a:lnTo>
+                  <a:lnTo>
+                    <a:pt x="1289205" y="513505"/>
+                  </a:lnTo>
+                  <a:lnTo>
+                    <a:pt x="1360827" y="537437"/>
+                  </a:lnTo>
+                  <a:lnTo>
+                    <a:pt x="1432450" y="560941"/>
+                  </a:lnTo>
+                  <a:lnTo>
+                    <a:pt x="1504073" y="584025"/>
+                  </a:lnTo>
+                  <a:lnTo>
+                    <a:pt x="1575695" y="606697"/>
+                  </a:lnTo>
+                  <a:lnTo>
+                    <a:pt x="1647318" y="628963"/>
+                  </a:lnTo>
+                  <a:lnTo>
+                    <a:pt x="1718940" y="650832"/>
+                  </a:lnTo>
+                  <a:lnTo>
+                    <a:pt x="1790563" y="672309"/>
+                  </a:lnTo>
+                  <a:lnTo>
+                    <a:pt x="1862185" y="693403"/>
+                  </a:lnTo>
+                  <a:lnTo>
+                    <a:pt x="1933808" y="714120"/>
+                  </a:lnTo>
+                  <a:lnTo>
+                    <a:pt x="2005430" y="734467"/>
+                  </a:lnTo>
+                  <a:lnTo>
+                    <a:pt x="2077053" y="754450"/>
+                  </a:lnTo>
+                  <a:lnTo>
+                    <a:pt x="2148675" y="774076"/>
+                  </a:lnTo>
+                  <a:lnTo>
+                    <a:pt x="2220298" y="793351"/>
+                  </a:lnTo>
+                  <a:lnTo>
+                    <a:pt x="2291920" y="812282"/>
+                  </a:lnTo>
+                  <a:lnTo>
+                    <a:pt x="2363543" y="830875"/>
+                  </a:lnTo>
+                  <a:lnTo>
+                    <a:pt x="2435165" y="849135"/>
+                  </a:lnTo>
+                  <a:lnTo>
+                    <a:pt x="2506788" y="867069"/>
+                  </a:lnTo>
+                  <a:lnTo>
+                    <a:pt x="2578410" y="884682"/>
+                  </a:lnTo>
+                  <a:lnTo>
+                    <a:pt x="2650033" y="901981"/>
+                  </a:lnTo>
+                  <a:lnTo>
+                    <a:pt x="2721655" y="918970"/>
+                  </a:lnTo>
+                  <a:lnTo>
+                    <a:pt x="2793278" y="935656"/>
+                  </a:lnTo>
+                  <a:lnTo>
+                    <a:pt x="2864901" y="952044"/>
+                  </a:lnTo>
+                  <a:lnTo>
+                    <a:pt x="2936523" y="968139"/>
+                  </a:lnTo>
+                  <a:lnTo>
+                    <a:pt x="3008146" y="983946"/>
+                  </a:lnTo>
+                  <a:lnTo>
+                    <a:pt x="3079768" y="999471"/>
+                  </a:lnTo>
+                  <a:lnTo>
+                    <a:pt x="3151391" y="1014718"/>
+                  </a:lnTo>
+                  <a:lnTo>
+                    <a:pt x="3223013" y="1023425"/>
+                  </a:lnTo>
+                  <a:lnTo>
+                    <a:pt x="3294636" y="1023926"/>
+                  </a:lnTo>
+                  <a:lnTo>
+                    <a:pt x="3366258" y="1024427"/>
+                  </a:lnTo>
+                  <a:lnTo>
+                    <a:pt x="3437881" y="1024927"/>
+                  </a:lnTo>
+                  <a:lnTo>
+                    <a:pt x="3509503" y="1025427"/>
+                  </a:lnTo>
+                  <a:lnTo>
+                    <a:pt x="3581126" y="1025927"/>
+                  </a:lnTo>
+                  <a:lnTo>
+                    <a:pt x="3652748" y="1026426"/>
+                  </a:lnTo>
+                  <a:lnTo>
+                    <a:pt x="3724371" y="1026925"/>
+                  </a:lnTo>
+                  <a:lnTo>
+                    <a:pt x="3795993" y="1027424"/>
+                  </a:lnTo>
+                  <a:lnTo>
+                    <a:pt x="3867616" y="1027922"/>
+                  </a:lnTo>
+                  <a:lnTo>
+                    <a:pt x="3939238" y="1028420"/>
+                  </a:lnTo>
+                  <a:lnTo>
+                    <a:pt x="4010861" y="1028918"/>
+                  </a:lnTo>
+                  <a:lnTo>
+                    <a:pt x="4082483" y="1029416"/>
+                  </a:lnTo>
+                  <a:lnTo>
+                    <a:pt x="4154106" y="1029913"/>
+                  </a:lnTo>
+                  <a:lnTo>
+                    <a:pt x="4225729" y="1030410"/>
+                  </a:lnTo>
+                  <a:lnTo>
+                    <a:pt x="4297351" y="1030907"/>
+                  </a:lnTo>
+                  <a:lnTo>
+                    <a:pt x="4368974" y="1031403"/>
+                  </a:lnTo>
+                  <a:lnTo>
+                    <a:pt x="4440596" y="1031899"/>
+                  </a:lnTo>
+                  <a:lnTo>
+                    <a:pt x="4512219" y="1032395"/>
+                  </a:lnTo>
+                  <a:lnTo>
+                    <a:pt x="4583841" y="1032891"/>
+                  </a:lnTo>
+                  <a:lnTo>
+                    <a:pt x="4655464" y="1033386"/>
+                  </a:lnTo>
+                  <a:lnTo>
+                    <a:pt x="4727086" y="1033881"/>
+                  </a:lnTo>
+                  <a:lnTo>
+                    <a:pt x="4798709" y="1034375"/>
+                  </a:lnTo>
+                  <a:lnTo>
+                    <a:pt x="4870331" y="1034870"/>
+                  </a:lnTo>
+                  <a:lnTo>
+                    <a:pt x="4941954" y="1035364"/>
+                  </a:lnTo>
+                  <a:lnTo>
+                    <a:pt x="5013576" y="1035857"/>
+                  </a:lnTo>
+                  <a:lnTo>
+                    <a:pt x="5085199" y="1036351"/>
+                  </a:lnTo>
+                  <a:lnTo>
+                    <a:pt x="5156821" y="1036844"/>
+                  </a:lnTo>
+                  <a:lnTo>
+                    <a:pt x="5228444" y="1037337"/>
+                  </a:lnTo>
+                  <a:lnTo>
+                    <a:pt x="5300066" y="1037829"/>
+                  </a:lnTo>
+                  <a:lnTo>
+                    <a:pt x="5371689" y="1038321"/>
+                  </a:lnTo>
+                  <a:lnTo>
+                    <a:pt x="5443311" y="1038813"/>
+                  </a:lnTo>
+                  <a:lnTo>
+                    <a:pt x="5514934" y="1039305"/>
+                  </a:lnTo>
+                  <a:lnTo>
+                    <a:pt x="5586557" y="1039796"/>
+                  </a:lnTo>
+                  <a:lnTo>
+                    <a:pt x="5658179" y="1040287"/>
+                  </a:lnTo>
+                  <a:lnTo>
+                    <a:pt x="5729802" y="1040778"/>
+                  </a:lnTo>
+                  <a:lnTo>
+                    <a:pt x="5801424" y="1041268"/>
+                  </a:lnTo>
+                  <a:lnTo>
+                    <a:pt x="5873047" y="1041758"/>
+                  </a:lnTo>
+                  <a:lnTo>
+                    <a:pt x="5944669" y="1042248"/>
+                  </a:lnTo>
+                  <a:lnTo>
+                    <a:pt x="6016292" y="1042738"/>
+                  </a:lnTo>
+                  <a:lnTo>
+                    <a:pt x="6087914" y="1043227"/>
+                  </a:lnTo>
+                  <a:lnTo>
+                    <a:pt x="6159537" y="1043716"/>
+                  </a:lnTo>
+                  <a:lnTo>
+                    <a:pt x="6231159" y="1044205"/>
+                  </a:lnTo>
+                  <a:lnTo>
+                    <a:pt x="6302782" y="1044693"/>
+                  </a:lnTo>
+                  <a:lnTo>
+                    <a:pt x="6374404" y="1045181"/>
+                  </a:lnTo>
+                  <a:lnTo>
+                    <a:pt x="6446027" y="1045669"/>
+                  </a:lnTo>
+                  <a:lnTo>
+                    <a:pt x="6517649" y="1046156"/>
+                  </a:lnTo>
+                  <a:lnTo>
+                    <a:pt x="6589272" y="1046643"/>
+                  </a:lnTo>
+                  <a:lnTo>
+                    <a:pt x="6660894" y="1047130"/>
+                  </a:lnTo>
+                  <a:lnTo>
+                    <a:pt x="6732517" y="1047617"/>
+                  </a:lnTo>
+                  <a:lnTo>
+                    <a:pt x="6804139" y="1048103"/>
+                  </a:lnTo>
+                  <a:lnTo>
+                    <a:pt x="6875762" y="1048589"/>
+                  </a:lnTo>
+                  <a:lnTo>
+                    <a:pt x="6947385" y="1049075"/>
+                  </a:lnTo>
+                  <a:lnTo>
+                    <a:pt x="7019007" y="1049560"/>
+                  </a:lnTo>
+                  <a:lnTo>
+                    <a:pt x="7090630" y="1050045"/>
+                  </a:lnTo>
+                  <a:lnTo>
+                    <a:pt x="7090630" y="1541860"/>
+                  </a:lnTo>
+                  <a:lnTo>
+                    <a:pt x="7019007" y="1536204"/>
+                  </a:lnTo>
+                  <a:lnTo>
+                    <a:pt x="6947385" y="1530446"/>
+                  </a:lnTo>
+                  <a:lnTo>
+                    <a:pt x="6875762" y="1524583"/>
+                  </a:lnTo>
+                  <a:lnTo>
+                    <a:pt x="6804139" y="1518613"/>
+                  </a:lnTo>
+                  <a:lnTo>
+                    <a:pt x="6732517" y="1512535"/>
+                  </a:lnTo>
+                  <a:lnTo>
+                    <a:pt x="6660894" y="1506345"/>
+                  </a:lnTo>
+                  <a:lnTo>
+                    <a:pt x="6589272" y="1500044"/>
+                  </a:lnTo>
+                  <a:lnTo>
+                    <a:pt x="6517649" y="1493627"/>
+                  </a:lnTo>
+                  <a:lnTo>
+                    <a:pt x="6446027" y="1487094"/>
+                  </a:lnTo>
+                  <a:lnTo>
+                    <a:pt x="6374404" y="1480442"/>
+                  </a:lnTo>
+                  <a:lnTo>
+                    <a:pt x="6302782" y="1473669"/>
+                  </a:lnTo>
+                  <a:lnTo>
+                    <a:pt x="6231159" y="1466773"/>
+                  </a:lnTo>
+                  <a:lnTo>
+                    <a:pt x="6159537" y="1459751"/>
+                  </a:lnTo>
+                  <a:lnTo>
+                    <a:pt x="6087914" y="1452602"/>
+                  </a:lnTo>
+                  <a:lnTo>
+                    <a:pt x="6016292" y="1445322"/>
+                  </a:lnTo>
+                  <a:lnTo>
+                    <a:pt x="5944669" y="1437910"/>
+                  </a:lnTo>
+                  <a:lnTo>
+                    <a:pt x="5873047" y="1430363"/>
+                  </a:lnTo>
+                  <a:lnTo>
+                    <a:pt x="5801424" y="1422679"/>
+                  </a:lnTo>
+                  <a:lnTo>
+                    <a:pt x="5729802" y="1414855"/>
+                  </a:lnTo>
+                  <a:lnTo>
+                    <a:pt x="5658179" y="1406888"/>
+                  </a:lnTo>
+                  <a:lnTo>
+                    <a:pt x="5586557" y="1398777"/>
+                  </a:lnTo>
+                  <a:lnTo>
+                    <a:pt x="5514934" y="1390518"/>
+                  </a:lnTo>
+                  <a:lnTo>
+                    <a:pt x="5443311" y="1382109"/>
+                  </a:lnTo>
+                  <a:lnTo>
+                    <a:pt x="5371689" y="1373546"/>
+                  </a:lnTo>
+                  <a:lnTo>
+                    <a:pt x="5300066" y="1364828"/>
+                  </a:lnTo>
+                  <a:lnTo>
+                    <a:pt x="5228444" y="1355952"/>
+                  </a:lnTo>
+                  <a:lnTo>
+                    <a:pt x="5156821" y="1346913"/>
+                  </a:lnTo>
+                  <a:lnTo>
+                    <a:pt x="5085199" y="1337711"/>
+                  </a:lnTo>
+                  <a:lnTo>
+                    <a:pt x="5013576" y="1328341"/>
+                  </a:lnTo>
+                  <a:lnTo>
+                    <a:pt x="4941954" y="1318800"/>
+                  </a:lnTo>
+                  <a:lnTo>
+                    <a:pt x="4870331" y="1309086"/>
+                  </a:lnTo>
+                  <a:lnTo>
+                    <a:pt x="4798709" y="1299195"/>
+                  </a:lnTo>
+                  <a:lnTo>
+                    <a:pt x="4727086" y="1289124"/>
+                  </a:lnTo>
+                  <a:lnTo>
+                    <a:pt x="4655464" y="1278869"/>
+                  </a:lnTo>
+                  <a:lnTo>
+                    <a:pt x="4583841" y="1268429"/>
+                  </a:lnTo>
+                  <a:lnTo>
+                    <a:pt x="4512219" y="1257798"/>
+                  </a:lnTo>
+                  <a:lnTo>
+                    <a:pt x="4440596" y="1246974"/>
+                  </a:lnTo>
+                  <a:lnTo>
+                    <a:pt x="4368974" y="1235952"/>
+                  </a:lnTo>
+                  <a:lnTo>
+                    <a:pt x="4297351" y="1224731"/>
+                  </a:lnTo>
+                  <a:lnTo>
+                    <a:pt x="4225729" y="1213305"/>
+                  </a:lnTo>
+                  <a:lnTo>
+                    <a:pt x="4154106" y="1201671"/>
+                  </a:lnTo>
+                  <a:lnTo>
+                    <a:pt x="4082483" y="1189825"/>
+                  </a:lnTo>
+                  <a:lnTo>
+                    <a:pt x="4010861" y="1177764"/>
+                  </a:lnTo>
+                  <a:lnTo>
+                    <a:pt x="3939238" y="1165484"/>
+                  </a:lnTo>
+                  <a:lnTo>
+                    <a:pt x="3867616" y="1152980"/>
+                  </a:lnTo>
+                  <a:lnTo>
+                    <a:pt x="3795993" y="1140248"/>
+                  </a:lnTo>
+                  <a:lnTo>
+                    <a:pt x="3724371" y="1127285"/>
+                  </a:lnTo>
+                  <a:lnTo>
+                    <a:pt x="3652748" y="1114086"/>
+                  </a:lnTo>
+                  <a:lnTo>
+                    <a:pt x="3581126" y="1100647"/>
+                  </a:lnTo>
+                  <a:lnTo>
+                    <a:pt x="3509503" y="1086963"/>
+                  </a:lnTo>
+                  <a:lnTo>
+                    <a:pt x="3437881" y="1073031"/>
+                  </a:lnTo>
+                  <a:lnTo>
+                    <a:pt x="3366258" y="1058844"/>
+                  </a:lnTo>
+                  <a:lnTo>
+                    <a:pt x="3294636" y="1044400"/>
+                  </a:lnTo>
+                  <a:lnTo>
+                    <a:pt x="3223013" y="1029693"/>
+                  </a:lnTo>
+                  <a:lnTo>
+                    <a:pt x="3151391" y="1022924"/>
+                  </a:lnTo>
+                  <a:lnTo>
+                    <a:pt x="3079768" y="1022422"/>
+                  </a:lnTo>
+                  <a:lnTo>
+                    <a:pt x="3008146" y="1021921"/>
+                  </a:lnTo>
+                  <a:lnTo>
+                    <a:pt x="2936523" y="1021418"/>
+                  </a:lnTo>
+                  <a:lnTo>
+                    <a:pt x="2864901" y="1020916"/>
+                  </a:lnTo>
+                  <a:lnTo>
+                    <a:pt x="2793278" y="1020413"/>
+                  </a:lnTo>
+                  <a:lnTo>
+                    <a:pt x="2721655" y="1019910"/>
+                  </a:lnTo>
+                  <a:lnTo>
+                    <a:pt x="2650033" y="1019407"/>
+                  </a:lnTo>
+                  <a:lnTo>
+                    <a:pt x="2578410" y="1018903"/>
+                  </a:lnTo>
+                  <a:lnTo>
+                    <a:pt x="2506788" y="1018399"/>
+                  </a:lnTo>
+                  <a:lnTo>
+                    <a:pt x="2435165" y="1017895"/>
+                  </a:lnTo>
+                  <a:lnTo>
+                    <a:pt x="2363543" y="1017391"/>
+                  </a:lnTo>
+                  <a:lnTo>
+                    <a:pt x="2291920" y="1016886"/>
+                  </a:lnTo>
+                  <a:lnTo>
+                    <a:pt x="2220298" y="1016381"/>
+                  </a:lnTo>
+                  <a:lnTo>
+                    <a:pt x="2148675" y="1015875"/>
+                  </a:lnTo>
+                  <a:lnTo>
+                    <a:pt x="2077053" y="1015369"/>
+                  </a:lnTo>
+                  <a:lnTo>
+                    <a:pt x="2005430" y="1014863"/>
+                  </a:lnTo>
+                  <a:lnTo>
+                    <a:pt x="1933808" y="1014357"/>
+                  </a:lnTo>
+                  <a:lnTo>
+                    <a:pt x="1862185" y="1013850"/>
+                  </a:lnTo>
+                  <a:lnTo>
+                    <a:pt x="1790563" y="1013343"/>
+                  </a:lnTo>
+                  <a:lnTo>
+                    <a:pt x="1718940" y="1012836"/>
+                  </a:lnTo>
+                  <a:lnTo>
+                    <a:pt x="1647318" y="1012328"/>
+                  </a:lnTo>
+                  <a:lnTo>
+                    <a:pt x="1575695" y="1011820"/>
+                  </a:lnTo>
+                  <a:lnTo>
+                    <a:pt x="1504073" y="1011312"/>
+                  </a:lnTo>
+                  <a:lnTo>
+                    <a:pt x="1432450" y="1010804"/>
+                  </a:lnTo>
+                  <a:lnTo>
+                    <a:pt x="1360827" y="1010295"/>
+                  </a:lnTo>
+                  <a:lnTo>
+                    <a:pt x="1289205" y="1009786"/>
+                  </a:lnTo>
+                  <a:lnTo>
+                    <a:pt x="1217582" y="1009276"/>
+                  </a:lnTo>
+                  <a:lnTo>
+                    <a:pt x="1145960" y="1008766"/>
+                  </a:lnTo>
+                  <a:lnTo>
+                    <a:pt x="1074337" y="1008256"/>
+                  </a:lnTo>
+                  <a:lnTo>
+                    <a:pt x="1002715" y="1007746"/>
+                  </a:lnTo>
+                  <a:lnTo>
+                    <a:pt x="931092" y="1007235"/>
+                  </a:lnTo>
+                  <a:lnTo>
+                    <a:pt x="859470" y="1006724"/>
+                  </a:lnTo>
+                  <a:lnTo>
+                    <a:pt x="787847" y="1006213"/>
+                  </a:lnTo>
+                  <a:lnTo>
+                    <a:pt x="716225" y="1005701"/>
+                  </a:lnTo>
+                  <a:lnTo>
+                    <a:pt x="644602" y="1005189"/>
+                  </a:lnTo>
+                  <a:lnTo>
+                    <a:pt x="572980" y="1004677"/>
+                  </a:lnTo>
+                  <a:lnTo>
+                    <a:pt x="501357" y="1004165"/>
+                  </a:lnTo>
+                  <a:lnTo>
+                    <a:pt x="429735" y="1003652"/>
+                  </a:lnTo>
+                  <a:lnTo>
+                    <a:pt x="358112" y="1003139"/>
+                  </a:lnTo>
+                  <a:lnTo>
+                    <a:pt x="286490" y="1002625"/>
+                  </a:lnTo>
+                  <a:lnTo>
+                    <a:pt x="214867" y="1002111"/>
+                  </a:lnTo>
+                  <a:lnTo>
+                    <a:pt x="143245" y="1001597"/>
+                  </a:lnTo>
+                  <a:lnTo>
+                    <a:pt x="71622" y="1001083"/>
+                  </a:lnTo>
+                  <a:lnTo>
+                    <a:pt x="0" y="1000568"/>
                   </a:lnTo>
                   <a:close/>
                 </a:path>
@@ -3633,312 +3633,312 @@
           </p:nvSpPr>
           <p:spPr>
             <a:xfrm>
-              <a:off x="1172049" y="3691571"/>
-              <a:ext cx="7090630" cy="1066751"/>
+              <a:off x="1172049" y="3704579"/>
+              <a:ext cx="7090630" cy="1050045"/>
             </a:xfrm>
             <a:custGeom>
               <a:avLst/>
               <a:pathLst>
-                <a:path w="7090630" h="1066751">
+                <a:path w="7090630" h="1050045">
                   <a:moveTo>
                     <a:pt x="0" y="0"/>
                   </a:moveTo>
                   <a:lnTo>
-                    <a:pt x="71622" y="33628"/>
-                  </a:lnTo>
-                  <a:lnTo>
-                    <a:pt x="143245" y="66651"/>
-                  </a:lnTo>
-                  <a:lnTo>
-                    <a:pt x="214867" y="99078"/>
-                  </a:lnTo>
-                  <a:lnTo>
-                    <a:pt x="286490" y="130921"/>
-                  </a:lnTo>
-                  <a:lnTo>
-                    <a:pt x="358112" y="162189"/>
-                  </a:lnTo>
-                  <a:lnTo>
-                    <a:pt x="429735" y="192895"/>
-                  </a:lnTo>
-                  <a:lnTo>
-                    <a:pt x="501357" y="223046"/>
-                  </a:lnTo>
-                  <a:lnTo>
-                    <a:pt x="572980" y="252655"/>
-                  </a:lnTo>
-                  <a:lnTo>
-                    <a:pt x="644602" y="281729"/>
-                  </a:lnTo>
-                  <a:lnTo>
-                    <a:pt x="716225" y="310280"/>
-                  </a:lnTo>
-                  <a:lnTo>
-                    <a:pt x="787847" y="338315"/>
-                  </a:lnTo>
-                  <a:lnTo>
-                    <a:pt x="859470" y="365846"/>
-                  </a:lnTo>
-                  <a:lnTo>
-                    <a:pt x="931092" y="392880"/>
-                  </a:lnTo>
-                  <a:lnTo>
-                    <a:pt x="1002715" y="419427"/>
-                  </a:lnTo>
-                  <a:lnTo>
-                    <a:pt x="1074337" y="445496"/>
-                  </a:lnTo>
-                  <a:lnTo>
-                    <a:pt x="1145960" y="471094"/>
-                  </a:lnTo>
-                  <a:lnTo>
-                    <a:pt x="1217582" y="496232"/>
-                  </a:lnTo>
-                  <a:lnTo>
-                    <a:pt x="1289205" y="520916"/>
-                  </a:lnTo>
-                  <a:lnTo>
-                    <a:pt x="1360827" y="545155"/>
-                  </a:lnTo>
-                  <a:lnTo>
-                    <a:pt x="1432450" y="568957"/>
-                  </a:lnTo>
-                  <a:lnTo>
-                    <a:pt x="1504073" y="592330"/>
-                  </a:lnTo>
-                  <a:lnTo>
-                    <a:pt x="1575695" y="615282"/>
-                  </a:lnTo>
-                  <a:lnTo>
-                    <a:pt x="1647318" y="637821"/>
-                  </a:lnTo>
-                  <a:lnTo>
-                    <a:pt x="1718940" y="659952"/>
-                  </a:lnTo>
-                  <a:lnTo>
-                    <a:pt x="1790563" y="681686"/>
-                  </a:lnTo>
-                  <a:lnTo>
-                    <a:pt x="1862185" y="703027"/>
-                  </a:lnTo>
-                  <a:lnTo>
-                    <a:pt x="1933808" y="723984"/>
-                  </a:lnTo>
-                  <a:lnTo>
-                    <a:pt x="2005430" y="744562"/>
-                  </a:lnTo>
-                  <a:lnTo>
-                    <a:pt x="2077053" y="764770"/>
-                  </a:lnTo>
-                  <a:lnTo>
-                    <a:pt x="2148675" y="784614"/>
-                  </a:lnTo>
-                  <a:lnTo>
-                    <a:pt x="2220298" y="804100"/>
-                  </a:lnTo>
-                  <a:lnTo>
-                    <a:pt x="2291920" y="823235"/>
-                  </a:lnTo>
-                  <a:lnTo>
-                    <a:pt x="2363543" y="842025"/>
-                  </a:lnTo>
-                  <a:lnTo>
-                    <a:pt x="2435165" y="860476"/>
-                  </a:lnTo>
-                  <a:lnTo>
-                    <a:pt x="2506788" y="878595"/>
-                  </a:lnTo>
-                  <a:lnTo>
-                    <a:pt x="2578410" y="896387"/>
-                  </a:lnTo>
-                  <a:lnTo>
-                    <a:pt x="2650033" y="913858"/>
-                  </a:lnTo>
-                  <a:lnTo>
-                    <a:pt x="2721655" y="931015"/>
-                  </a:lnTo>
-                  <a:lnTo>
-                    <a:pt x="2793278" y="947862"/>
-                  </a:lnTo>
-                  <a:lnTo>
-                    <a:pt x="2864901" y="964405"/>
-                  </a:lnTo>
-                  <a:lnTo>
-                    <a:pt x="2936523" y="980651"/>
-                  </a:lnTo>
-                  <a:lnTo>
-                    <a:pt x="3008146" y="996603"/>
-                  </a:lnTo>
-                  <a:lnTo>
-                    <a:pt x="3079768" y="1012268"/>
-                  </a:lnTo>
-                  <a:lnTo>
-                    <a:pt x="3151391" y="1027651"/>
-                  </a:lnTo>
-                  <a:lnTo>
-                    <a:pt x="3223013" y="1036463"/>
-                  </a:lnTo>
-                  <a:lnTo>
-                    <a:pt x="3294636" y="1037034"/>
-                  </a:lnTo>
-                  <a:lnTo>
-                    <a:pt x="3366258" y="1037605"/>
-                  </a:lnTo>
-                  <a:lnTo>
-                    <a:pt x="3437881" y="1038175"/>
-                  </a:lnTo>
-                  <a:lnTo>
-                    <a:pt x="3509503" y="1038745"/>
-                  </a:lnTo>
-                  <a:lnTo>
-                    <a:pt x="3581126" y="1039315"/>
-                  </a:lnTo>
-                  <a:lnTo>
-                    <a:pt x="3652748" y="1039884"/>
-                  </a:lnTo>
-                  <a:lnTo>
-                    <a:pt x="3724371" y="1040453"/>
-                  </a:lnTo>
-                  <a:lnTo>
-                    <a:pt x="3795993" y="1041021"/>
-                  </a:lnTo>
-                  <a:lnTo>
-                    <a:pt x="3867616" y="1041589"/>
-                  </a:lnTo>
-                  <a:lnTo>
-                    <a:pt x="3939238" y="1042157"/>
-                  </a:lnTo>
-                  <a:lnTo>
-                    <a:pt x="4010861" y="1042724"/>
-                  </a:lnTo>
-                  <a:lnTo>
-                    <a:pt x="4082483" y="1043291"/>
-                  </a:lnTo>
-                  <a:lnTo>
-                    <a:pt x="4154106" y="1043858"/>
-                  </a:lnTo>
-                  <a:lnTo>
-                    <a:pt x="4225729" y="1044424"/>
-                  </a:lnTo>
-                  <a:lnTo>
-                    <a:pt x="4297351" y="1044990"/>
-                  </a:lnTo>
-                  <a:lnTo>
-                    <a:pt x="4368974" y="1045555"/>
-                  </a:lnTo>
-                  <a:lnTo>
-                    <a:pt x="4440596" y="1046120"/>
-                  </a:lnTo>
-                  <a:lnTo>
-                    <a:pt x="4512219" y="1046684"/>
-                  </a:lnTo>
-                  <a:lnTo>
-                    <a:pt x="4583841" y="1047249"/>
-                  </a:lnTo>
-                  <a:lnTo>
-                    <a:pt x="4655464" y="1047812"/>
-                  </a:lnTo>
-                  <a:lnTo>
-                    <a:pt x="4727086" y="1048376"/>
-                  </a:lnTo>
-                  <a:lnTo>
-                    <a:pt x="4798709" y="1048939"/>
-                  </a:lnTo>
-                  <a:lnTo>
-                    <a:pt x="4870331" y="1049501"/>
-                  </a:lnTo>
-                  <a:lnTo>
-                    <a:pt x="4941954" y="1050064"/>
-                  </a:lnTo>
-                  <a:lnTo>
-                    <a:pt x="5013576" y="1050625"/>
-                  </a:lnTo>
-                  <a:lnTo>
-                    <a:pt x="5085199" y="1051187"/>
-                  </a:lnTo>
-                  <a:lnTo>
-                    <a:pt x="5156821" y="1051748"/>
-                  </a:lnTo>
-                  <a:lnTo>
-                    <a:pt x="5228444" y="1052309"/>
-                  </a:lnTo>
-                  <a:lnTo>
-                    <a:pt x="5300066" y="1052869"/>
-                  </a:lnTo>
-                  <a:lnTo>
-                    <a:pt x="5371689" y="1053429"/>
-                  </a:lnTo>
-                  <a:lnTo>
-                    <a:pt x="5443311" y="1053988"/>
-                  </a:lnTo>
-                  <a:lnTo>
-                    <a:pt x="5514934" y="1054547"/>
-                  </a:lnTo>
-                  <a:lnTo>
-                    <a:pt x="5586557" y="1055106"/>
-                  </a:lnTo>
-                  <a:lnTo>
-                    <a:pt x="5658179" y="1055664"/>
-                  </a:lnTo>
-                  <a:lnTo>
-                    <a:pt x="5729802" y="1056222"/>
-                  </a:lnTo>
-                  <a:lnTo>
-                    <a:pt x="5801424" y="1056780"/>
-                  </a:lnTo>
-                  <a:lnTo>
-                    <a:pt x="5873047" y="1057337"/>
-                  </a:lnTo>
-                  <a:lnTo>
-                    <a:pt x="5944669" y="1057894"/>
-                  </a:lnTo>
-                  <a:lnTo>
-                    <a:pt x="6016292" y="1058451"/>
-                  </a:lnTo>
-                  <a:lnTo>
-                    <a:pt x="6087914" y="1059007"/>
-                  </a:lnTo>
-                  <a:lnTo>
-                    <a:pt x="6159537" y="1059562"/>
-                  </a:lnTo>
-                  <a:lnTo>
-                    <a:pt x="6231159" y="1060118"/>
-                  </a:lnTo>
-                  <a:lnTo>
-                    <a:pt x="6302782" y="1060672"/>
-                  </a:lnTo>
-                  <a:lnTo>
-                    <a:pt x="6374404" y="1061227"/>
-                  </a:lnTo>
-                  <a:lnTo>
-                    <a:pt x="6446027" y="1061781"/>
-                  </a:lnTo>
-                  <a:lnTo>
-                    <a:pt x="6517649" y="1062335"/>
-                  </a:lnTo>
-                  <a:lnTo>
-                    <a:pt x="6589272" y="1062888"/>
-                  </a:lnTo>
-                  <a:lnTo>
-                    <a:pt x="6660894" y="1063441"/>
-                  </a:lnTo>
-                  <a:lnTo>
-                    <a:pt x="6732517" y="1063994"/>
-                  </a:lnTo>
-                  <a:lnTo>
-                    <a:pt x="6804139" y="1064546"/>
-                  </a:lnTo>
-                  <a:lnTo>
-                    <a:pt x="6875762" y="1065098"/>
-                  </a:lnTo>
-                  <a:lnTo>
-                    <a:pt x="6947385" y="1065649"/>
-                  </a:lnTo>
-                  <a:lnTo>
-                    <a:pt x="7019007" y="1066201"/>
-                  </a:lnTo>
-                  <a:lnTo>
-                    <a:pt x="7090630" y="1066751"/>
+                    <a:pt x="71622" y="33108"/>
+                  </a:lnTo>
+                  <a:lnTo>
+                    <a:pt x="143245" y="65625"/>
+                  </a:lnTo>
+                  <a:lnTo>
+                    <a:pt x="214867" y="97561"/>
+                  </a:lnTo>
+                  <a:lnTo>
+                    <a:pt x="286490" y="128926"/>
+                  </a:lnTo>
+                  <a:lnTo>
+                    <a:pt x="358112" y="159730"/>
+                  </a:lnTo>
+                  <a:lnTo>
+                    <a:pt x="429735" y="189984"/>
+                  </a:lnTo>
+                  <a:lnTo>
+                    <a:pt x="501357" y="219698"/>
+                  </a:lnTo>
+                  <a:lnTo>
+                    <a:pt x="572980" y="248880"/>
+                  </a:lnTo>
+                  <a:lnTo>
+                    <a:pt x="644602" y="277541"/>
+                  </a:lnTo>
+                  <a:lnTo>
+                    <a:pt x="716225" y="305690"/>
+                  </a:lnTo>
+                  <a:lnTo>
+                    <a:pt x="787847" y="333335"/>
+                  </a:lnTo>
+                  <a:lnTo>
+                    <a:pt x="859470" y="360487"/>
+                  </a:lnTo>
+                  <a:lnTo>
+                    <a:pt x="931092" y="387153"/>
+                  </a:lnTo>
+                  <a:lnTo>
+                    <a:pt x="1002715" y="413343"/>
+                  </a:lnTo>
+                  <a:lnTo>
+                    <a:pt x="1074337" y="439065"/>
+                  </a:lnTo>
+                  <a:lnTo>
+                    <a:pt x="1145960" y="464327"/>
+                  </a:lnTo>
+                  <a:lnTo>
+                    <a:pt x="1217582" y="489138"/>
+                  </a:lnTo>
+                  <a:lnTo>
+                    <a:pt x="1289205" y="513505"/>
+                  </a:lnTo>
+                  <a:lnTo>
+                    <a:pt x="1360827" y="537437"/>
+                  </a:lnTo>
+                  <a:lnTo>
+                    <a:pt x="1432450" y="560941"/>
+                  </a:lnTo>
+                  <a:lnTo>
+                    <a:pt x="1504073" y="584025"/>
+                  </a:lnTo>
+                  <a:lnTo>
+                    <a:pt x="1575695" y="606697"/>
+                  </a:lnTo>
+                  <a:lnTo>
+                    <a:pt x="1647318" y="628963"/>
+                  </a:lnTo>
+                  <a:lnTo>
+                    <a:pt x="1718940" y="650832"/>
+                  </a:lnTo>
+                  <a:lnTo>
+                    <a:pt x="1790563" y="672309"/>
+                  </a:lnTo>
+                  <a:lnTo>
+                    <a:pt x="1862185" y="693403"/>
+                  </a:lnTo>
+                  <a:lnTo>
+                    <a:pt x="1933808" y="714120"/>
+                  </a:lnTo>
+                  <a:lnTo>
+                    <a:pt x="2005430" y="734467"/>
+                  </a:lnTo>
+                  <a:lnTo>
+                    <a:pt x="2077053" y="754450"/>
+                  </a:lnTo>
+                  <a:lnTo>
+                    <a:pt x="2148675" y="774076"/>
+                  </a:lnTo>
+                  <a:lnTo>
+                    <a:pt x="2220298" y="793351"/>
+                  </a:lnTo>
+                  <a:lnTo>
+                    <a:pt x="2291920" y="812282"/>
+                  </a:lnTo>
+                  <a:lnTo>
+                    <a:pt x="2363543" y="830875"/>
+                  </a:lnTo>
+                  <a:lnTo>
+                    <a:pt x="2435165" y="849135"/>
+                  </a:lnTo>
+                  <a:lnTo>
+                    <a:pt x="2506788" y="867069"/>
+                  </a:lnTo>
+                  <a:lnTo>
+                    <a:pt x="2578410" y="884682"/>
+                  </a:lnTo>
+                  <a:lnTo>
+                    <a:pt x="2650033" y="901981"/>
+                  </a:lnTo>
+                  <a:lnTo>
+                    <a:pt x="2721655" y="918970"/>
+                  </a:lnTo>
+                  <a:lnTo>
+                    <a:pt x="2793278" y="935656"/>
+                  </a:lnTo>
+                  <a:lnTo>
+                    <a:pt x="2864901" y="952044"/>
+                  </a:lnTo>
+                  <a:lnTo>
+                    <a:pt x="2936523" y="968139"/>
+                  </a:lnTo>
+                  <a:lnTo>
+                    <a:pt x="3008146" y="983946"/>
+                  </a:lnTo>
+                  <a:lnTo>
+                    <a:pt x="3079768" y="999471"/>
+                  </a:lnTo>
+                  <a:lnTo>
+                    <a:pt x="3151391" y="1014718"/>
+                  </a:lnTo>
+                  <a:lnTo>
+                    <a:pt x="3223013" y="1023425"/>
+                  </a:lnTo>
+                  <a:lnTo>
+                    <a:pt x="3294636" y="1023926"/>
+                  </a:lnTo>
+                  <a:lnTo>
+                    <a:pt x="3366258" y="1024427"/>
+                  </a:lnTo>
+                  <a:lnTo>
+                    <a:pt x="3437881" y="1024927"/>
+                  </a:lnTo>
+                  <a:lnTo>
+                    <a:pt x="3509503" y="1025427"/>
+                  </a:lnTo>
+                  <a:lnTo>
+                    <a:pt x="3581126" y="1025927"/>
+                  </a:lnTo>
+                  <a:lnTo>
+                    <a:pt x="3652748" y="1026426"/>
+                  </a:lnTo>
+                  <a:lnTo>
+                    <a:pt x="3724371" y="1026925"/>
+                  </a:lnTo>
+                  <a:lnTo>
+                    <a:pt x="3795993" y="1027424"/>
+                  </a:lnTo>
+                  <a:lnTo>
+                    <a:pt x="3867616" y="1027922"/>
+                  </a:lnTo>
+                  <a:lnTo>
+                    <a:pt x="3939238" y="1028420"/>
+                  </a:lnTo>
+                  <a:lnTo>
+                    <a:pt x="4010861" y="1028918"/>
+                  </a:lnTo>
+                  <a:lnTo>
+                    <a:pt x="4082483" y="1029416"/>
+                  </a:lnTo>
+                  <a:lnTo>
+                    <a:pt x="4154106" y="1029913"/>
+                  </a:lnTo>
+                  <a:lnTo>
+                    <a:pt x="4225729" y="1030410"/>
+                  </a:lnTo>
+                  <a:lnTo>
+                    <a:pt x="4297351" y="1030907"/>
+                  </a:lnTo>
+                  <a:lnTo>
+                    <a:pt x="4368974" y="1031403"/>
+                  </a:lnTo>
+                  <a:lnTo>
+                    <a:pt x="4440596" y="1031899"/>
+                  </a:lnTo>
+                  <a:lnTo>
+                    <a:pt x="4512219" y="1032395"/>
+                  </a:lnTo>
+                  <a:lnTo>
+                    <a:pt x="4583841" y="1032891"/>
+                  </a:lnTo>
+                  <a:lnTo>
+                    <a:pt x="4655464" y="1033386"/>
+                  </a:lnTo>
+                  <a:lnTo>
+                    <a:pt x="4727086" y="1033881"/>
+                  </a:lnTo>
+                  <a:lnTo>
+                    <a:pt x="4798709" y="1034375"/>
+                  </a:lnTo>
+                  <a:lnTo>
+                    <a:pt x="4870331" y="1034870"/>
+                  </a:lnTo>
+                  <a:lnTo>
+                    <a:pt x="4941954" y="1035364"/>
+                  </a:lnTo>
+                  <a:lnTo>
+                    <a:pt x="5013576" y="1035857"/>
+                  </a:lnTo>
+                  <a:lnTo>
+                    <a:pt x="5085199" y="1036351"/>
+                  </a:lnTo>
+                  <a:lnTo>
+                    <a:pt x="5156821" y="1036844"/>
+                  </a:lnTo>
+                  <a:lnTo>
+                    <a:pt x="5228444" y="1037337"/>
+                  </a:lnTo>
+                  <a:lnTo>
+                    <a:pt x="5300066" y="1037829"/>
+                  </a:lnTo>
+                  <a:lnTo>
+                    <a:pt x="5371689" y="1038321"/>
+                  </a:lnTo>
+                  <a:lnTo>
+                    <a:pt x="5443311" y="1038813"/>
+                  </a:lnTo>
+                  <a:lnTo>
+                    <a:pt x="5514934" y="1039305"/>
+                  </a:lnTo>
+                  <a:lnTo>
+                    <a:pt x="5586557" y="1039796"/>
+                  </a:lnTo>
+                  <a:lnTo>
+                    <a:pt x="5658179" y="1040287"/>
+                  </a:lnTo>
+                  <a:lnTo>
+                    <a:pt x="5729802" y="1040778"/>
+                  </a:lnTo>
+                  <a:lnTo>
+                    <a:pt x="5801424" y="1041268"/>
+                  </a:lnTo>
+                  <a:lnTo>
+                    <a:pt x="5873047" y="1041758"/>
+                  </a:lnTo>
+                  <a:lnTo>
+                    <a:pt x="5944669" y="1042248"/>
+                  </a:lnTo>
+                  <a:lnTo>
+                    <a:pt x="6016292" y="1042738"/>
+                  </a:lnTo>
+                  <a:lnTo>
+                    <a:pt x="6087914" y="1043227"/>
+                  </a:lnTo>
+                  <a:lnTo>
+                    <a:pt x="6159537" y="1043716"/>
+                  </a:lnTo>
+                  <a:lnTo>
+                    <a:pt x="6231159" y="1044205"/>
+                  </a:lnTo>
+                  <a:lnTo>
+                    <a:pt x="6302782" y="1044693"/>
+                  </a:lnTo>
+                  <a:lnTo>
+                    <a:pt x="6374404" y="1045181"/>
+                  </a:lnTo>
+                  <a:lnTo>
+                    <a:pt x="6446027" y="1045669"/>
+                  </a:lnTo>
+                  <a:lnTo>
+                    <a:pt x="6517649" y="1046156"/>
+                  </a:lnTo>
+                  <a:lnTo>
+                    <a:pt x="6589272" y="1046643"/>
+                  </a:lnTo>
+                  <a:lnTo>
+                    <a:pt x="6660894" y="1047130"/>
+                  </a:lnTo>
+                  <a:lnTo>
+                    <a:pt x="6732517" y="1047617"/>
+                  </a:lnTo>
+                  <a:lnTo>
+                    <a:pt x="6804139" y="1048103"/>
+                  </a:lnTo>
+                  <a:lnTo>
+                    <a:pt x="6875762" y="1048589"/>
+                  </a:lnTo>
+                  <a:lnTo>
+                    <a:pt x="6947385" y="1049075"/>
+                  </a:lnTo>
+                  <a:lnTo>
+                    <a:pt x="7019007" y="1049560"/>
+                  </a:lnTo>
+                  <a:lnTo>
+                    <a:pt x="7090630" y="1050045"/>
                   </a:lnTo>
                 </a:path>
               </a:pathLst>
@@ -3958,309 +3958,309 @@
           </p:nvSpPr>
           <p:spPr>
             <a:xfrm>
-              <a:off x="1172049" y="4701919"/>
-              <a:ext cx="7090630" cy="547164"/>
+              <a:off x="1172049" y="4705147"/>
+              <a:ext cx="7090630" cy="541291"/>
             </a:xfrm>
             <a:custGeom>
               <a:avLst/>
               <a:pathLst>
-                <a:path w="7090630" h="547164">
+                <a:path w="7090630" h="541291">
                   <a:moveTo>
-                    <a:pt x="7090630" y="547164"/>
+                    <a:pt x="7090630" y="541291"/>
                   </a:moveTo>
                   <a:lnTo>
-                    <a:pt x="7019007" y="541508"/>
-                  </a:lnTo>
-                  <a:lnTo>
-                    <a:pt x="6947385" y="535747"/>
-                  </a:lnTo>
-                  <a:lnTo>
-                    <a:pt x="6875762" y="529881"/>
-                  </a:lnTo>
-                  <a:lnTo>
-                    <a:pt x="6804139" y="523907"/>
-                  </a:lnTo>
-                  <a:lnTo>
-                    <a:pt x="6732517" y="517824"/>
-                  </a:lnTo>
-                  <a:lnTo>
-                    <a:pt x="6660894" y="511628"/>
-                  </a:lnTo>
-                  <a:lnTo>
-                    <a:pt x="6589272" y="505320"/>
-                  </a:lnTo>
-                  <a:lnTo>
-                    <a:pt x="6517649" y="498895"/>
-                  </a:lnTo>
-                  <a:lnTo>
-                    <a:pt x="6446027" y="492352"/>
-                  </a:lnTo>
-                  <a:lnTo>
-                    <a:pt x="6374404" y="485690"/>
-                  </a:lnTo>
-                  <a:lnTo>
-                    <a:pt x="6302782" y="478904"/>
-                  </a:lnTo>
-                  <a:lnTo>
-                    <a:pt x="6231159" y="471995"/>
-                  </a:lnTo>
-                  <a:lnTo>
-                    <a:pt x="6159537" y="464959"/>
-                  </a:lnTo>
-                  <a:lnTo>
-                    <a:pt x="6087914" y="457793"/>
-                  </a:lnTo>
-                  <a:lnTo>
-                    <a:pt x="6016292" y="450496"/>
-                  </a:lnTo>
-                  <a:lnTo>
-                    <a:pt x="5944669" y="443065"/>
-                  </a:lnTo>
-                  <a:lnTo>
-                    <a:pt x="5873047" y="435497"/>
-                  </a:lnTo>
-                  <a:lnTo>
-                    <a:pt x="5801424" y="427791"/>
-                  </a:lnTo>
-                  <a:lnTo>
-                    <a:pt x="5729802" y="419943"/>
-                  </a:lnTo>
-                  <a:lnTo>
-                    <a:pt x="5658179" y="411951"/>
-                  </a:lnTo>
-                  <a:lnTo>
-                    <a:pt x="5586557" y="403813"/>
-                  </a:lnTo>
-                  <a:lnTo>
-                    <a:pt x="5514934" y="395525"/>
-                  </a:lnTo>
-                  <a:lnTo>
-                    <a:pt x="5443311" y="387085"/>
-                  </a:lnTo>
-                  <a:lnTo>
-                    <a:pt x="5371689" y="378490"/>
-                  </a:lnTo>
-                  <a:lnTo>
-                    <a:pt x="5300066" y="369737"/>
-                  </a:lnTo>
-                  <a:lnTo>
-                    <a:pt x="5228444" y="360824"/>
-                  </a:lnTo>
-                  <a:lnTo>
-                    <a:pt x="5156821" y="351747"/>
-                  </a:lnTo>
-                  <a:lnTo>
-                    <a:pt x="5085199" y="342503"/>
-                  </a:lnTo>
-                  <a:lnTo>
-                    <a:pt x="5013576" y="333090"/>
-                  </a:lnTo>
-                  <a:lnTo>
-                    <a:pt x="4941954" y="323504"/>
-                  </a:lnTo>
-                  <a:lnTo>
-                    <a:pt x="4870331" y="313741"/>
-                  </a:lnTo>
-                  <a:lnTo>
-                    <a:pt x="4798709" y="303800"/>
-                  </a:lnTo>
-                  <a:lnTo>
-                    <a:pt x="4727086" y="293676"/>
-                  </a:lnTo>
-                  <a:lnTo>
-                    <a:pt x="4655464" y="283367"/>
-                  </a:lnTo>
-                  <a:lnTo>
-                    <a:pt x="4583841" y="272868"/>
-                  </a:lnTo>
-                  <a:lnTo>
-                    <a:pt x="4512219" y="262177"/>
-                  </a:lnTo>
-                  <a:lnTo>
-                    <a:pt x="4440596" y="251289"/>
-                  </a:lnTo>
-                  <a:lnTo>
-                    <a:pt x="4368974" y="240201"/>
-                  </a:lnTo>
-                  <a:lnTo>
-                    <a:pt x="4297351" y="228910"/>
-                  </a:lnTo>
-                  <a:lnTo>
-                    <a:pt x="4225729" y="217412"/>
-                  </a:lnTo>
-                  <a:lnTo>
-                    <a:pt x="4154106" y="205702"/>
-                  </a:lnTo>
-                  <a:lnTo>
-                    <a:pt x="4082483" y="193778"/>
-                  </a:lnTo>
-                  <a:lnTo>
-                    <a:pt x="4010861" y="181634"/>
-                  </a:lnTo>
-                  <a:lnTo>
-                    <a:pt x="3939238" y="169268"/>
-                  </a:lnTo>
-                  <a:lnTo>
-                    <a:pt x="3867616" y="156675"/>
-                  </a:lnTo>
-                  <a:lnTo>
-                    <a:pt x="3795993" y="143851"/>
-                  </a:lnTo>
-                  <a:lnTo>
-                    <a:pt x="3724371" y="130791"/>
-                  </a:lnTo>
-                  <a:lnTo>
-                    <a:pt x="3652748" y="117492"/>
-                  </a:lnTo>
-                  <a:lnTo>
-                    <a:pt x="3581126" y="103948"/>
-                  </a:lnTo>
-                  <a:lnTo>
-                    <a:pt x="3509503" y="90156"/>
-                  </a:lnTo>
-                  <a:lnTo>
-                    <a:pt x="3437881" y="76111"/>
-                  </a:lnTo>
-                  <a:lnTo>
-                    <a:pt x="3366258" y="61807"/>
-                  </a:lnTo>
-                  <a:lnTo>
-                    <a:pt x="3294636" y="47242"/>
-                  </a:lnTo>
-                  <a:lnTo>
-                    <a:pt x="3223013" y="32409"/>
-                  </a:lnTo>
-                  <a:lnTo>
-                    <a:pt x="3151391" y="25544"/>
-                  </a:lnTo>
-                  <a:lnTo>
-                    <a:pt x="3079768" y="24972"/>
-                  </a:lnTo>
-                  <a:lnTo>
-                    <a:pt x="3008146" y="24399"/>
-                  </a:lnTo>
-                  <a:lnTo>
-                    <a:pt x="2936523" y="23827"/>
-                  </a:lnTo>
-                  <a:lnTo>
-                    <a:pt x="2864901" y="23253"/>
-                  </a:lnTo>
-                  <a:lnTo>
-                    <a:pt x="2793278" y="22680"/>
-                  </a:lnTo>
-                  <a:lnTo>
-                    <a:pt x="2721655" y="22106"/>
-                  </a:lnTo>
-                  <a:lnTo>
-                    <a:pt x="2650033" y="21531"/>
-                  </a:lnTo>
-                  <a:lnTo>
-                    <a:pt x="2578410" y="20957"/>
-                  </a:lnTo>
-                  <a:lnTo>
-                    <a:pt x="2506788" y="20382"/>
-                  </a:lnTo>
-                  <a:lnTo>
-                    <a:pt x="2435165" y="19806"/>
-                  </a:lnTo>
-                  <a:lnTo>
-                    <a:pt x="2363543" y="19230"/>
-                  </a:lnTo>
-                  <a:lnTo>
-                    <a:pt x="2291920" y="18654"/>
-                  </a:lnTo>
-                  <a:lnTo>
-                    <a:pt x="2220298" y="18077"/>
-                  </a:lnTo>
-                  <a:lnTo>
-                    <a:pt x="2148675" y="17500"/>
-                  </a:lnTo>
-                  <a:lnTo>
-                    <a:pt x="2077053" y="16922"/>
-                  </a:lnTo>
-                  <a:lnTo>
-                    <a:pt x="2005430" y="16344"/>
-                  </a:lnTo>
-                  <a:lnTo>
-                    <a:pt x="1933808" y="15766"/>
-                  </a:lnTo>
-                  <a:lnTo>
-                    <a:pt x="1862185" y="15187"/>
-                  </a:lnTo>
-                  <a:lnTo>
-                    <a:pt x="1790563" y="14608"/>
-                  </a:lnTo>
-                  <a:lnTo>
-                    <a:pt x="1718940" y="14029"/>
-                  </a:lnTo>
-                  <a:lnTo>
-                    <a:pt x="1647318" y="13449"/>
-                  </a:lnTo>
-                  <a:lnTo>
-                    <a:pt x="1575695" y="12868"/>
-                  </a:lnTo>
-                  <a:lnTo>
-                    <a:pt x="1504073" y="12288"/>
-                  </a:lnTo>
-                  <a:lnTo>
-                    <a:pt x="1432450" y="11707"/>
-                  </a:lnTo>
-                  <a:lnTo>
-                    <a:pt x="1360827" y="11125"/>
-                  </a:lnTo>
-                  <a:lnTo>
-                    <a:pt x="1289205" y="10543"/>
-                  </a:lnTo>
-                  <a:lnTo>
-                    <a:pt x="1217582" y="9961"/>
-                  </a:lnTo>
-                  <a:lnTo>
-                    <a:pt x="1145960" y="9378"/>
-                  </a:lnTo>
-                  <a:lnTo>
-                    <a:pt x="1074337" y="8795"/>
-                  </a:lnTo>
-                  <a:lnTo>
-                    <a:pt x="1002715" y="8211"/>
-                  </a:lnTo>
-                  <a:lnTo>
-                    <a:pt x="931092" y="7627"/>
-                  </a:lnTo>
-                  <a:lnTo>
-                    <a:pt x="859470" y="7043"/>
-                  </a:lnTo>
-                  <a:lnTo>
-                    <a:pt x="787847" y="6458"/>
-                  </a:lnTo>
-                  <a:lnTo>
-                    <a:pt x="716225" y="5873"/>
-                  </a:lnTo>
-                  <a:lnTo>
-                    <a:pt x="644602" y="5288"/>
-                  </a:lnTo>
-                  <a:lnTo>
-                    <a:pt x="572980" y="4702"/>
-                  </a:lnTo>
-                  <a:lnTo>
-                    <a:pt x="501357" y="4115"/>
-                  </a:lnTo>
-                  <a:lnTo>
-                    <a:pt x="429735" y="3529"/>
-                  </a:lnTo>
-                  <a:lnTo>
-                    <a:pt x="358112" y="2941"/>
-                  </a:lnTo>
-                  <a:lnTo>
-                    <a:pt x="286490" y="2354"/>
-                  </a:lnTo>
-                  <a:lnTo>
-                    <a:pt x="214867" y="1766"/>
-                  </a:lnTo>
-                  <a:lnTo>
-                    <a:pt x="143245" y="1177"/>
-                  </a:lnTo>
-                  <a:lnTo>
-                    <a:pt x="71622" y="589"/>
+                    <a:pt x="7019007" y="535636"/>
+                  </a:lnTo>
+                  <a:lnTo>
+                    <a:pt x="6947385" y="529877"/>
+                  </a:lnTo>
+                  <a:lnTo>
+                    <a:pt x="6875762" y="524014"/>
+                  </a:lnTo>
+                  <a:lnTo>
+                    <a:pt x="6804139" y="518044"/>
+                  </a:lnTo>
+                  <a:lnTo>
+                    <a:pt x="6732517" y="511966"/>
+                  </a:lnTo>
+                  <a:lnTo>
+                    <a:pt x="6660894" y="505777"/>
+                  </a:lnTo>
+                  <a:lnTo>
+                    <a:pt x="6589272" y="499475"/>
+                  </a:lnTo>
+                  <a:lnTo>
+                    <a:pt x="6517649" y="493059"/>
+                  </a:lnTo>
+                  <a:lnTo>
+                    <a:pt x="6446027" y="486526"/>
+                  </a:lnTo>
+                  <a:lnTo>
+                    <a:pt x="6374404" y="479874"/>
+                  </a:lnTo>
+                  <a:lnTo>
+                    <a:pt x="6302782" y="473101"/>
+                  </a:lnTo>
+                  <a:lnTo>
+                    <a:pt x="6231159" y="466204"/>
+                  </a:lnTo>
+                  <a:lnTo>
+                    <a:pt x="6159537" y="459183"/>
+                  </a:lnTo>
+                  <a:lnTo>
+                    <a:pt x="6087914" y="452033"/>
+                  </a:lnTo>
+                  <a:lnTo>
+                    <a:pt x="6016292" y="444753"/>
+                  </a:lnTo>
+                  <a:lnTo>
+                    <a:pt x="5944669" y="437341"/>
+                  </a:lnTo>
+                  <a:lnTo>
+                    <a:pt x="5873047" y="429794"/>
+                  </a:lnTo>
+                  <a:lnTo>
+                    <a:pt x="5801424" y="422110"/>
+                  </a:lnTo>
+                  <a:lnTo>
+                    <a:pt x="5729802" y="414286"/>
+                  </a:lnTo>
+                  <a:lnTo>
+                    <a:pt x="5658179" y="406320"/>
+                  </a:lnTo>
+                  <a:lnTo>
+                    <a:pt x="5586557" y="398208"/>
+                  </a:lnTo>
+                  <a:lnTo>
+                    <a:pt x="5514934" y="389949"/>
+                  </a:lnTo>
+                  <a:lnTo>
+                    <a:pt x="5443311" y="381540"/>
+                  </a:lnTo>
+                  <a:lnTo>
+                    <a:pt x="5371689" y="372978"/>
+                  </a:lnTo>
+                  <a:lnTo>
+                    <a:pt x="5300066" y="364260"/>
+                  </a:lnTo>
+                  <a:lnTo>
+                    <a:pt x="5228444" y="355383"/>
+                  </a:lnTo>
+                  <a:lnTo>
+                    <a:pt x="5156821" y="346345"/>
+                  </a:lnTo>
+                  <a:lnTo>
+                    <a:pt x="5085199" y="337142"/>
+                  </a:lnTo>
+                  <a:lnTo>
+                    <a:pt x="5013576" y="327772"/>
+                  </a:lnTo>
+                  <a:lnTo>
+                    <a:pt x="4941954" y="318231"/>
+                  </a:lnTo>
+                  <a:lnTo>
+                    <a:pt x="4870331" y="308517"/>
+                  </a:lnTo>
+                  <a:lnTo>
+                    <a:pt x="4798709" y="298626"/>
+                  </a:lnTo>
+                  <a:lnTo>
+                    <a:pt x="4727086" y="288555"/>
+                  </a:lnTo>
+                  <a:lnTo>
+                    <a:pt x="4655464" y="278301"/>
+                  </a:lnTo>
+                  <a:lnTo>
+                    <a:pt x="4583841" y="267860"/>
+                  </a:lnTo>
+                  <a:lnTo>
+                    <a:pt x="4512219" y="257229"/>
+                  </a:lnTo>
+                  <a:lnTo>
+                    <a:pt x="4440596" y="246405"/>
+                  </a:lnTo>
+                  <a:lnTo>
+                    <a:pt x="4368974" y="235384"/>
+                  </a:lnTo>
+                  <a:lnTo>
+                    <a:pt x="4297351" y="224162"/>
+                  </a:lnTo>
+                  <a:lnTo>
+                    <a:pt x="4225729" y="212736"/>
+                  </a:lnTo>
+                  <a:lnTo>
+                    <a:pt x="4154106" y="201102"/>
+                  </a:lnTo>
+                  <a:lnTo>
+                    <a:pt x="4082483" y="189257"/>
+                  </a:lnTo>
+                  <a:lnTo>
+                    <a:pt x="4010861" y="177196"/>
+                  </a:lnTo>
+                  <a:lnTo>
+                    <a:pt x="3939238" y="164915"/>
+                  </a:lnTo>
+                  <a:lnTo>
+                    <a:pt x="3867616" y="152411"/>
+                  </a:lnTo>
+                  <a:lnTo>
+                    <a:pt x="3795993" y="139680"/>
+                  </a:lnTo>
+                  <a:lnTo>
+                    <a:pt x="3724371" y="126717"/>
+                  </a:lnTo>
+                  <a:lnTo>
+                    <a:pt x="3652748" y="113518"/>
+                  </a:lnTo>
+                  <a:lnTo>
+                    <a:pt x="3581126" y="100078"/>
+                  </a:lnTo>
+                  <a:lnTo>
+                    <a:pt x="3509503" y="86395"/>
+                  </a:lnTo>
+                  <a:lnTo>
+                    <a:pt x="3437881" y="72462"/>
+                  </a:lnTo>
+                  <a:lnTo>
+                    <a:pt x="3366258" y="58276"/>
+                  </a:lnTo>
+                  <a:lnTo>
+                    <a:pt x="3294636" y="43831"/>
+                  </a:lnTo>
+                  <a:lnTo>
+                    <a:pt x="3223013" y="29124"/>
+                  </a:lnTo>
+                  <a:lnTo>
+                    <a:pt x="3151391" y="22355"/>
+                  </a:lnTo>
+                  <a:lnTo>
+                    <a:pt x="3079768" y="21854"/>
+                  </a:lnTo>
+                  <a:lnTo>
+                    <a:pt x="3008146" y="21352"/>
+                  </a:lnTo>
+                  <a:lnTo>
+                    <a:pt x="2936523" y="20850"/>
+                  </a:lnTo>
+                  <a:lnTo>
+                    <a:pt x="2864901" y="20347"/>
+                  </a:lnTo>
+                  <a:lnTo>
+                    <a:pt x="2793278" y="19845"/>
+                  </a:lnTo>
+                  <a:lnTo>
+                    <a:pt x="2721655" y="19342"/>
+                  </a:lnTo>
+                  <a:lnTo>
+                    <a:pt x="2650033" y="18838"/>
+                  </a:lnTo>
+                  <a:lnTo>
+                    <a:pt x="2578410" y="18335"/>
+                  </a:lnTo>
+                  <a:lnTo>
+                    <a:pt x="2506788" y="17831"/>
+                  </a:lnTo>
+                  <a:lnTo>
+                    <a:pt x="2435165" y="17326"/>
+                  </a:lnTo>
+                  <a:lnTo>
+                    <a:pt x="2363543" y="16822"/>
+                  </a:lnTo>
+                  <a:lnTo>
+                    <a:pt x="2291920" y="16317"/>
+                  </a:lnTo>
+                  <a:lnTo>
+                    <a:pt x="2220298" y="15812"/>
+                  </a:lnTo>
+                  <a:lnTo>
+                    <a:pt x="2148675" y="15306"/>
+                  </a:lnTo>
+                  <a:lnTo>
+                    <a:pt x="2077053" y="14801"/>
+                  </a:lnTo>
+                  <a:lnTo>
+                    <a:pt x="2005430" y="14294"/>
+                  </a:lnTo>
+                  <a:lnTo>
+                    <a:pt x="1933808" y="13788"/>
+                  </a:lnTo>
+                  <a:lnTo>
+                    <a:pt x="1862185" y="13281"/>
+                  </a:lnTo>
+                  <a:lnTo>
+                    <a:pt x="1790563" y="12774"/>
+                  </a:lnTo>
+                  <a:lnTo>
+                    <a:pt x="1718940" y="12267"/>
+                  </a:lnTo>
+                  <a:lnTo>
+                    <a:pt x="1647318" y="11760"/>
+                  </a:lnTo>
+                  <a:lnTo>
+                    <a:pt x="1575695" y="11252"/>
+                  </a:lnTo>
+                  <a:lnTo>
+                    <a:pt x="1504073" y="10743"/>
+                  </a:lnTo>
+                  <a:lnTo>
+                    <a:pt x="1432450" y="10235"/>
+                  </a:lnTo>
+                  <a:lnTo>
+                    <a:pt x="1360827" y="9726"/>
+                  </a:lnTo>
+                  <a:lnTo>
+                    <a:pt x="1289205" y="9217"/>
+                  </a:lnTo>
+                  <a:lnTo>
+                    <a:pt x="1217582" y="8707"/>
+                  </a:lnTo>
+                  <a:lnTo>
+                    <a:pt x="1145960" y="8198"/>
+                  </a:lnTo>
+                  <a:lnTo>
+                    <a:pt x="1074337" y="7688"/>
+                  </a:lnTo>
+                  <a:lnTo>
+                    <a:pt x="1002715" y="7177"/>
+                  </a:lnTo>
+                  <a:lnTo>
+                    <a:pt x="931092" y="6667"/>
+                  </a:lnTo>
+                  <a:lnTo>
+                    <a:pt x="859470" y="6156"/>
+                  </a:lnTo>
+                  <a:lnTo>
+                    <a:pt x="787847" y="5644"/>
+                  </a:lnTo>
+                  <a:lnTo>
+                    <a:pt x="716225" y="5133"/>
+                  </a:lnTo>
+                  <a:lnTo>
+                    <a:pt x="644602" y="4621"/>
+                  </a:lnTo>
+                  <a:lnTo>
+                    <a:pt x="572980" y="4108"/>
+                  </a:lnTo>
+                  <a:lnTo>
+                    <a:pt x="501357" y="3596"/>
+                  </a:lnTo>
+                  <a:lnTo>
+                    <a:pt x="429735" y="3083"/>
+                  </a:lnTo>
+                  <a:lnTo>
+                    <a:pt x="358112" y="2570"/>
+                  </a:lnTo>
+                  <a:lnTo>
+                    <a:pt x="286490" y="2056"/>
+                  </a:lnTo>
+                  <a:lnTo>
+                    <a:pt x="214867" y="1543"/>
+                  </a:lnTo>
+                  <a:lnTo>
+                    <a:pt x="143245" y="1029"/>
+                  </a:lnTo>
+                  <a:lnTo>
+                    <a:pt x="71622" y="514"/>
                   </a:lnTo>
                   <a:lnTo>
                     <a:pt x="0" y="0"/>
@@ -4283,312 +4283,312 @@
           </p:nvSpPr>
           <p:spPr>
             <a:xfrm>
-              <a:off x="1172049" y="4294011"/>
-              <a:ext cx="7090630" cy="767051"/>
+              <a:off x="1172049" y="4300800"/>
+              <a:ext cx="7090630" cy="756985"/>
             </a:xfrm>
             <a:custGeom>
               <a:avLst/>
               <a:pathLst>
-                <a:path w="7090630" h="767051">
+                <a:path w="7090630" h="756985">
                   <a:moveTo>
                     <a:pt x="0" y="0"/>
                   </a:moveTo>
                   <a:lnTo>
-                    <a:pt x="71622" y="11867"/>
-                  </a:lnTo>
-                  <a:lnTo>
-                    <a:pt x="143245" y="23624"/>
-                  </a:lnTo>
-                  <a:lnTo>
-                    <a:pt x="214867" y="35270"/>
-                  </a:lnTo>
-                  <a:lnTo>
-                    <a:pt x="286490" y="46806"/>
-                  </a:lnTo>
-                  <a:lnTo>
-                    <a:pt x="358112" y="58234"/>
-                  </a:lnTo>
-                  <a:lnTo>
-                    <a:pt x="429735" y="69555"/>
-                  </a:lnTo>
-                  <a:lnTo>
-                    <a:pt x="501357" y="80769"/>
-                  </a:lnTo>
-                  <a:lnTo>
-                    <a:pt x="572980" y="91878"/>
-                  </a:lnTo>
-                  <a:lnTo>
-                    <a:pt x="644602" y="102883"/>
-                  </a:lnTo>
-                  <a:lnTo>
-                    <a:pt x="716225" y="113784"/>
-                  </a:lnTo>
-                  <a:lnTo>
-                    <a:pt x="787847" y="124583"/>
-                  </a:lnTo>
-                  <a:lnTo>
-                    <a:pt x="859470" y="135281"/>
-                  </a:lnTo>
-                  <a:lnTo>
-                    <a:pt x="931092" y="145878"/>
-                  </a:lnTo>
-                  <a:lnTo>
-                    <a:pt x="1002715" y="156375"/>
-                  </a:lnTo>
-                  <a:lnTo>
-                    <a:pt x="1074337" y="166774"/>
-                  </a:lnTo>
-                  <a:lnTo>
-                    <a:pt x="1145960" y="177075"/>
-                  </a:lnTo>
-                  <a:lnTo>
-                    <a:pt x="1217582" y="187279"/>
-                  </a:lnTo>
-                  <a:lnTo>
-                    <a:pt x="1289205" y="197387"/>
-                  </a:lnTo>
-                  <a:lnTo>
-                    <a:pt x="1360827" y="207401"/>
-                  </a:lnTo>
-                  <a:lnTo>
-                    <a:pt x="1432450" y="217320"/>
-                  </a:lnTo>
-                  <a:lnTo>
-                    <a:pt x="1504073" y="227146"/>
-                  </a:lnTo>
-                  <a:lnTo>
-                    <a:pt x="1575695" y="236880"/>
-                  </a:lnTo>
-                  <a:lnTo>
-                    <a:pt x="1647318" y="246523"/>
-                  </a:lnTo>
-                  <a:lnTo>
-                    <a:pt x="1718940" y="256075"/>
-                  </a:lnTo>
-                  <a:lnTo>
-                    <a:pt x="1790563" y="265537"/>
-                  </a:lnTo>
-                  <a:lnTo>
-                    <a:pt x="1862185" y="274910"/>
-                  </a:lnTo>
-                  <a:lnTo>
-                    <a:pt x="1933808" y="284195"/>
-                  </a:lnTo>
-                  <a:lnTo>
-                    <a:pt x="2005430" y="293393"/>
-                  </a:lnTo>
-                  <a:lnTo>
-                    <a:pt x="2077053" y="302504"/>
-                  </a:lnTo>
-                  <a:lnTo>
-                    <a:pt x="2148675" y="311530"/>
-                  </a:lnTo>
-                  <a:lnTo>
-                    <a:pt x="2220298" y="320471"/>
-                  </a:lnTo>
-                  <a:lnTo>
-                    <a:pt x="2291920" y="329328"/>
-                  </a:lnTo>
-                  <a:lnTo>
-                    <a:pt x="2363543" y="338102"/>
-                  </a:lnTo>
-                  <a:lnTo>
-                    <a:pt x="2435165" y="346794"/>
-                  </a:lnTo>
-                  <a:lnTo>
-                    <a:pt x="2506788" y="355404"/>
-                  </a:lnTo>
-                  <a:lnTo>
-                    <a:pt x="2578410" y="363932"/>
-                  </a:lnTo>
-                  <a:lnTo>
-                    <a:pt x="2650033" y="372381"/>
-                  </a:lnTo>
-                  <a:lnTo>
-                    <a:pt x="2721655" y="380751"/>
-                  </a:lnTo>
-                  <a:lnTo>
-                    <a:pt x="2793278" y="389041"/>
-                  </a:lnTo>
-                  <a:lnTo>
-                    <a:pt x="2864901" y="397254"/>
-                  </a:lnTo>
-                  <a:lnTo>
-                    <a:pt x="2936523" y="405390"/>
-                  </a:lnTo>
-                  <a:lnTo>
-                    <a:pt x="3008146" y="413449"/>
-                  </a:lnTo>
-                  <a:lnTo>
-                    <a:pt x="3079768" y="421433"/>
-                  </a:lnTo>
-                  <a:lnTo>
-                    <a:pt x="3151391" y="429342"/>
-                  </a:lnTo>
-                  <a:lnTo>
-                    <a:pt x="3223013" y="437176"/>
-                  </a:lnTo>
-                  <a:lnTo>
-                    <a:pt x="3294636" y="444937"/>
-                  </a:lnTo>
-                  <a:lnTo>
-                    <a:pt x="3366258" y="452624"/>
-                  </a:lnTo>
-                  <a:lnTo>
-                    <a:pt x="3437881" y="460240"/>
-                  </a:lnTo>
-                  <a:lnTo>
-                    <a:pt x="3509503" y="467784"/>
-                  </a:lnTo>
-                  <a:lnTo>
-                    <a:pt x="3581126" y="475257"/>
-                  </a:lnTo>
-                  <a:lnTo>
-                    <a:pt x="3652748" y="482660"/>
-                  </a:lnTo>
-                  <a:lnTo>
-                    <a:pt x="3724371" y="489993"/>
-                  </a:lnTo>
-                  <a:lnTo>
-                    <a:pt x="3795993" y="497258"/>
-                  </a:lnTo>
-                  <a:lnTo>
-                    <a:pt x="3867616" y="504454"/>
-                  </a:lnTo>
-                  <a:lnTo>
-                    <a:pt x="3939238" y="511583"/>
-                  </a:lnTo>
-                  <a:lnTo>
-                    <a:pt x="4010861" y="518644"/>
-                  </a:lnTo>
-                  <a:lnTo>
-                    <a:pt x="4082483" y="525639"/>
-                  </a:lnTo>
-                  <a:lnTo>
-                    <a:pt x="4154106" y="532569"/>
-                  </a:lnTo>
-                  <a:lnTo>
-                    <a:pt x="4225729" y="539434"/>
-                  </a:lnTo>
-                  <a:lnTo>
-                    <a:pt x="4297351" y="546234"/>
-                  </a:lnTo>
-                  <a:lnTo>
-                    <a:pt x="4368974" y="552970"/>
-                  </a:lnTo>
-                  <a:lnTo>
-                    <a:pt x="4440596" y="559642"/>
-                  </a:lnTo>
-                  <a:lnTo>
-                    <a:pt x="4512219" y="566253"/>
-                  </a:lnTo>
-                  <a:lnTo>
-                    <a:pt x="4583841" y="572801"/>
-                  </a:lnTo>
-                  <a:lnTo>
-                    <a:pt x="4655464" y="579287"/>
-                  </a:lnTo>
-                  <a:lnTo>
-                    <a:pt x="4727086" y="585713"/>
-                  </a:lnTo>
-                  <a:lnTo>
-                    <a:pt x="4798709" y="592078"/>
-                  </a:lnTo>
-                  <a:lnTo>
-                    <a:pt x="4870331" y="598383"/>
-                  </a:lnTo>
-                  <a:lnTo>
-                    <a:pt x="4941954" y="604629"/>
-                  </a:lnTo>
-                  <a:lnTo>
-                    <a:pt x="5013576" y="610817"/>
-                  </a:lnTo>
-                  <a:lnTo>
-                    <a:pt x="5085199" y="616946"/>
-                  </a:lnTo>
-                  <a:lnTo>
-                    <a:pt x="5156821" y="623018"/>
-                  </a:lnTo>
-                  <a:lnTo>
-                    <a:pt x="5228444" y="629033"/>
-                  </a:lnTo>
-                  <a:lnTo>
-                    <a:pt x="5300066" y="634991"/>
-                  </a:lnTo>
-                  <a:lnTo>
-                    <a:pt x="5371689" y="640893"/>
-                  </a:lnTo>
-                  <a:lnTo>
-                    <a:pt x="5443311" y="646740"/>
-                  </a:lnTo>
-                  <a:lnTo>
-                    <a:pt x="5514934" y="652532"/>
-                  </a:lnTo>
-                  <a:lnTo>
-                    <a:pt x="5586557" y="658269"/>
-                  </a:lnTo>
-                  <a:lnTo>
-                    <a:pt x="5658179" y="663953"/>
-                  </a:lnTo>
-                  <a:lnTo>
-                    <a:pt x="5729802" y="669583"/>
-                  </a:lnTo>
-                  <a:lnTo>
-                    <a:pt x="5801424" y="675160"/>
-                  </a:lnTo>
-                  <a:lnTo>
-                    <a:pt x="5873047" y="680685"/>
-                  </a:lnTo>
-                  <a:lnTo>
-                    <a:pt x="5944669" y="686158"/>
-                  </a:lnTo>
-                  <a:lnTo>
-                    <a:pt x="6016292" y="691580"/>
-                  </a:lnTo>
-                  <a:lnTo>
-                    <a:pt x="6087914" y="696950"/>
-                  </a:lnTo>
-                  <a:lnTo>
-                    <a:pt x="6159537" y="702271"/>
-                  </a:lnTo>
-                  <a:lnTo>
-                    <a:pt x="6231159" y="707541"/>
-                  </a:lnTo>
-                  <a:lnTo>
-                    <a:pt x="6302782" y="712761"/>
-                  </a:lnTo>
-                  <a:lnTo>
-                    <a:pt x="6374404" y="717933"/>
-                  </a:lnTo>
-                  <a:lnTo>
-                    <a:pt x="6446027" y="723056"/>
-                  </a:lnTo>
-                  <a:lnTo>
-                    <a:pt x="6517649" y="728131"/>
-                  </a:lnTo>
-                  <a:lnTo>
-                    <a:pt x="6589272" y="733158"/>
-                  </a:lnTo>
-                  <a:lnTo>
-                    <a:pt x="6660894" y="738138"/>
-                  </a:lnTo>
-                  <a:lnTo>
-                    <a:pt x="6732517" y="743071"/>
-                  </a:lnTo>
-                  <a:lnTo>
-                    <a:pt x="6804139" y="747958"/>
-                  </a:lnTo>
-                  <a:lnTo>
-                    <a:pt x="6875762" y="752799"/>
-                  </a:lnTo>
-                  <a:lnTo>
-                    <a:pt x="6947385" y="757595"/>
-                  </a:lnTo>
-                  <a:lnTo>
-                    <a:pt x="7019007" y="762345"/>
-                  </a:lnTo>
-                  <a:lnTo>
-                    <a:pt x="7090630" y="767051"/>
+                    <a:pt x="71622" y="11653"/>
+                  </a:lnTo>
+                  <a:lnTo>
+                    <a:pt x="143245" y="23199"/>
+                  </a:lnTo>
+                  <a:lnTo>
+                    <a:pt x="214867" y="34637"/>
+                  </a:lnTo>
+                  <a:lnTo>
+                    <a:pt x="286490" y="45969"/>
+                  </a:lnTo>
+                  <a:lnTo>
+                    <a:pt x="358112" y="57196"/>
+                  </a:lnTo>
+                  <a:lnTo>
+                    <a:pt x="429735" y="68319"/>
+                  </a:lnTo>
+                  <a:lnTo>
+                    <a:pt x="501357" y="79339"/>
+                  </a:lnTo>
+                  <a:lnTo>
+                    <a:pt x="572980" y="90257"/>
+                  </a:lnTo>
+                  <a:lnTo>
+                    <a:pt x="644602" y="101073"/>
+                  </a:lnTo>
+                  <a:lnTo>
+                    <a:pt x="716225" y="111790"/>
+                  </a:lnTo>
+                  <a:lnTo>
+                    <a:pt x="787847" y="122406"/>
+                  </a:lnTo>
+                  <a:lnTo>
+                    <a:pt x="859470" y="132925"/>
+                  </a:lnTo>
+                  <a:lnTo>
+                    <a:pt x="931092" y="143345"/>
+                  </a:lnTo>
+                  <a:lnTo>
+                    <a:pt x="1002715" y="153669"/>
+                  </a:lnTo>
+                  <a:lnTo>
+                    <a:pt x="1074337" y="163898"/>
+                  </a:lnTo>
+                  <a:lnTo>
+                    <a:pt x="1145960" y="174031"/>
+                  </a:lnTo>
+                  <a:lnTo>
+                    <a:pt x="1217582" y="184070"/>
+                  </a:lnTo>
+                  <a:lnTo>
+                    <a:pt x="1289205" y="194017"/>
+                  </a:lnTo>
+                  <a:lnTo>
+                    <a:pt x="1360827" y="203871"/>
+                  </a:lnTo>
+                  <a:lnTo>
+                    <a:pt x="1432450" y="213633"/>
+                  </a:lnTo>
+                  <a:lnTo>
+                    <a:pt x="1504073" y="223306"/>
+                  </a:lnTo>
+                  <a:lnTo>
+                    <a:pt x="1575695" y="232888"/>
+                  </a:lnTo>
+                  <a:lnTo>
+                    <a:pt x="1647318" y="242381"/>
+                  </a:lnTo>
+                  <a:lnTo>
+                    <a:pt x="1718940" y="251787"/>
+                  </a:lnTo>
+                  <a:lnTo>
+                    <a:pt x="1790563" y="261105"/>
+                  </a:lnTo>
+                  <a:lnTo>
+                    <a:pt x="1862185" y="270337"/>
+                  </a:lnTo>
+                  <a:lnTo>
+                    <a:pt x="1933808" y="279483"/>
+                  </a:lnTo>
+                  <a:lnTo>
+                    <a:pt x="2005430" y="288544"/>
+                  </a:lnTo>
+                  <a:lnTo>
+                    <a:pt x="2077053" y="297522"/>
+                  </a:lnTo>
+                  <a:lnTo>
+                    <a:pt x="2148675" y="306416"/>
+                  </a:lnTo>
+                  <a:lnTo>
+                    <a:pt x="2220298" y="315227"/>
+                  </a:lnTo>
+                  <a:lnTo>
+                    <a:pt x="2291920" y="323957"/>
+                  </a:lnTo>
+                  <a:lnTo>
+                    <a:pt x="2363543" y="332606"/>
+                  </a:lnTo>
+                  <a:lnTo>
+                    <a:pt x="2435165" y="341175"/>
+                  </a:lnTo>
+                  <a:lnTo>
+                    <a:pt x="2506788" y="349664"/>
+                  </a:lnTo>
+                  <a:lnTo>
+                    <a:pt x="2578410" y="358074"/>
+                  </a:lnTo>
+                  <a:lnTo>
+                    <a:pt x="2650033" y="366407"/>
+                  </a:lnTo>
+                  <a:lnTo>
+                    <a:pt x="2721655" y="374662"/>
+                  </a:lnTo>
+                  <a:lnTo>
+                    <a:pt x="2793278" y="382840"/>
+                  </a:lnTo>
+                  <a:lnTo>
+                    <a:pt x="2864901" y="390943"/>
+                  </a:lnTo>
+                  <a:lnTo>
+                    <a:pt x="2936523" y="398971"/>
+                  </a:lnTo>
+                  <a:lnTo>
+                    <a:pt x="3008146" y="406924"/>
+                  </a:lnTo>
+                  <a:lnTo>
+                    <a:pt x="3079768" y="414803"/>
+                  </a:lnTo>
+                  <a:lnTo>
+                    <a:pt x="3151391" y="422609"/>
+                  </a:lnTo>
+                  <a:lnTo>
+                    <a:pt x="3223013" y="430343"/>
+                  </a:lnTo>
+                  <a:lnTo>
+                    <a:pt x="3294636" y="438005"/>
+                  </a:lnTo>
+                  <a:lnTo>
+                    <a:pt x="3366258" y="445596"/>
+                  </a:lnTo>
+                  <a:lnTo>
+                    <a:pt x="3437881" y="453117"/>
+                  </a:lnTo>
+                  <a:lnTo>
+                    <a:pt x="3509503" y="460568"/>
+                  </a:lnTo>
+                  <a:lnTo>
+                    <a:pt x="3581126" y="467950"/>
+                  </a:lnTo>
+                  <a:lnTo>
+                    <a:pt x="3652748" y="475263"/>
+                  </a:lnTo>
+                  <a:lnTo>
+                    <a:pt x="3724371" y="482509"/>
+                  </a:lnTo>
+                  <a:lnTo>
+                    <a:pt x="3795993" y="489687"/>
+                  </a:lnTo>
+                  <a:lnTo>
+                    <a:pt x="3867616" y="496799"/>
+                  </a:lnTo>
+                  <a:lnTo>
+                    <a:pt x="3939238" y="503844"/>
+                  </a:lnTo>
+                  <a:lnTo>
+                    <a:pt x="4010861" y="510825"/>
+                  </a:lnTo>
+                  <a:lnTo>
+                    <a:pt x="4082483" y="517740"/>
+                  </a:lnTo>
+                  <a:lnTo>
+                    <a:pt x="4154106" y="524592"/>
+                  </a:lnTo>
+                  <a:lnTo>
+                    <a:pt x="4225729" y="531380"/>
+                  </a:lnTo>
+                  <a:lnTo>
+                    <a:pt x="4297351" y="538105"/>
+                  </a:lnTo>
+                  <a:lnTo>
+                    <a:pt x="4368974" y="544768"/>
+                  </a:lnTo>
+                  <a:lnTo>
+                    <a:pt x="4440596" y="551368"/>
+                  </a:lnTo>
+                  <a:lnTo>
+                    <a:pt x="4512219" y="557908"/>
+                  </a:lnTo>
+                  <a:lnTo>
+                    <a:pt x="4583841" y="564387"/>
+                  </a:lnTo>
+                  <a:lnTo>
+                    <a:pt x="4655464" y="570806"/>
+                  </a:lnTo>
+                  <a:lnTo>
+                    <a:pt x="4727086" y="577165"/>
+                  </a:lnTo>
+                  <a:lnTo>
+                    <a:pt x="4798709" y="583466"/>
+                  </a:lnTo>
+                  <a:lnTo>
+                    <a:pt x="4870331" y="589708"/>
+                  </a:lnTo>
+                  <a:lnTo>
+                    <a:pt x="4941954" y="595892"/>
+                  </a:lnTo>
+                  <a:lnTo>
+                    <a:pt x="5013576" y="602018"/>
+                  </a:lnTo>
+                  <a:lnTo>
+                    <a:pt x="5085199" y="608088"/>
+                  </a:lnTo>
+                  <a:lnTo>
+                    <a:pt x="5156821" y="614102"/>
+                  </a:lnTo>
+                  <a:lnTo>
+                    <a:pt x="5228444" y="620059"/>
+                  </a:lnTo>
+                  <a:lnTo>
+                    <a:pt x="5300066" y="625962"/>
+                  </a:lnTo>
+                  <a:lnTo>
+                    <a:pt x="5371689" y="631810"/>
+                  </a:lnTo>
+                  <a:lnTo>
+                    <a:pt x="5443311" y="637603"/>
+                  </a:lnTo>
+                  <a:lnTo>
+                    <a:pt x="5514934" y="643343"/>
+                  </a:lnTo>
+                  <a:lnTo>
+                    <a:pt x="5586557" y="649029"/>
+                  </a:lnTo>
+                  <a:lnTo>
+                    <a:pt x="5658179" y="654663"/>
+                  </a:lnTo>
+                  <a:lnTo>
+                    <a:pt x="5729802" y="660245"/>
+                  </a:lnTo>
+                  <a:lnTo>
+                    <a:pt x="5801424" y="665775"/>
+                  </a:lnTo>
+                  <a:lnTo>
+                    <a:pt x="5873047" y="671253"/>
+                  </a:lnTo>
+                  <a:lnTo>
+                    <a:pt x="5944669" y="676681"/>
+                  </a:lnTo>
+                  <a:lnTo>
+                    <a:pt x="6016292" y="682058"/>
+                  </a:lnTo>
+                  <a:lnTo>
+                    <a:pt x="6087914" y="687386"/>
+                  </a:lnTo>
+                  <a:lnTo>
+                    <a:pt x="6159537" y="692664"/>
+                  </a:lnTo>
+                  <a:lnTo>
+                    <a:pt x="6231159" y="697893"/>
+                  </a:lnTo>
+                  <a:lnTo>
+                    <a:pt x="6302782" y="703073"/>
+                  </a:lnTo>
+                  <a:lnTo>
+                    <a:pt x="6374404" y="708206"/>
+                  </a:lnTo>
+                  <a:lnTo>
+                    <a:pt x="6446027" y="713291"/>
+                  </a:lnTo>
+                  <a:lnTo>
+                    <a:pt x="6517649" y="718329"/>
+                  </a:lnTo>
+                  <a:lnTo>
+                    <a:pt x="6589272" y="723320"/>
+                  </a:lnTo>
+                  <a:lnTo>
+                    <a:pt x="6660894" y="728265"/>
+                  </a:lnTo>
+                  <a:lnTo>
+                    <a:pt x="6732517" y="733163"/>
+                  </a:lnTo>
+                  <a:lnTo>
+                    <a:pt x="6804139" y="738017"/>
+                  </a:lnTo>
+                  <a:lnTo>
+                    <a:pt x="6875762" y="742825"/>
+                  </a:lnTo>
+                  <a:lnTo>
+                    <a:pt x="6947385" y="747589"/>
+                  </a:lnTo>
+                  <a:lnTo>
+                    <a:pt x="7019007" y="752309"/>
+                  </a:lnTo>
+                  <a:lnTo>
+                    <a:pt x="7090630" y="756985"/>
                   </a:lnTo>
                 </a:path>
               </a:pathLst>
@@ -5328,7 +5328,7 @@
                   <a:latin typeface="Helvetica"/>
                   <a:cs typeface="Helvetica"/>
                 </a:rPr>
-                <a:t>subHR per 10 % decline: 1.13 (1.01-1.26), p_Bonf = 0.207 (n = 6)  |  per IQR decline (Δ = 24.3 %): 1.34 (1.02-1.75)  |  IQR: [-22.7, 1.6] %</a:t>
+                <a:t>subHR per 10 % decline: 1.12 (1.01-1.26), p_Bonf = 0.217 (n = 6)  |  per IQR decline (Δ = 24.3 %): 1.33 (1.02-1.74)  |  IQR: [-22.7, 1.6] %</a:t>
               </a:r>
             </a:p>
           </p:txBody>
